--- a/content/W01/D4/slides/C2_W01_D04_half2_STUDENT.pptx
+++ b/content/W01/D4/slides/C2_W01_D04_half2_STUDENT.pptx
@@ -3704,14 +3704,14 @@
       </p:sp>
       <p:pic>
         <p:nvPicPr>
-          <p:cNvPr id="6" name="Picture 5" descr="d33728f2043afb5d.png"/>
+          <p:cNvPr id="6" name="Picture 5" descr="d064949aae10d69a.png"/>
           <p:cNvPicPr>
             <a:picLocks noChangeAspect="1"/>
           </p:cNvPicPr>
           <p:nvPr/>
         </p:nvPicPr>
         <p:blipFill>
-          <a:blip r:embed="rId2"/>
+          <a:blip r:embed="rId3"/>
           <a:stretch>
             <a:fillRect/>
           </a:stretch>
@@ -4461,14 +4461,14 @@
       </p:sp>
       <p:pic>
         <p:nvPicPr>
-          <p:cNvPr id="6" name="Picture 5" descr="6ef9286779ac24da.png"/>
+          <p:cNvPr id="6" name="Picture 5" descr="04f13dbeedb2d6e1.png"/>
           <p:cNvPicPr>
             <a:picLocks noChangeAspect="1"/>
           </p:cNvPicPr>
           <p:nvPr/>
         </p:nvPicPr>
         <p:blipFill>
-          <a:blip r:embed="rId2"/>
+          <a:blip r:embed="rId3"/>
           <a:stretch>
             <a:fillRect/>
           </a:stretch>
@@ -5764,14 +5764,14 @@
       </p:sp>
       <p:pic>
         <p:nvPicPr>
-          <p:cNvPr id="6" name="Picture 5" descr="c3d179e820454a1b.png"/>
+          <p:cNvPr id="6" name="Picture 5" descr="bffff91d9c21536c.png"/>
           <p:cNvPicPr>
             <a:picLocks noChangeAspect="1"/>
           </p:cNvPicPr>
           <p:nvPr/>
         </p:nvPicPr>
         <p:blipFill>
-          <a:blip r:embed="rId2"/>
+          <a:blip r:embed="rId3"/>
           <a:stretch>
             <a:fillRect/>
           </a:stretch>
@@ -6421,14 +6421,14 @@
       </p:sp>
       <p:pic>
         <p:nvPicPr>
-          <p:cNvPr id="6" name="Picture 5" descr="8800873784e7a8d9.png"/>
+          <p:cNvPr id="6" name="Picture 5" descr="f62e1e1db556da6b.png"/>
           <p:cNvPicPr>
             <a:picLocks noChangeAspect="1"/>
           </p:cNvPicPr>
           <p:nvPr/>
         </p:nvPicPr>
         <p:blipFill>
-          <a:blip r:embed="rId2"/>
+          <a:blip r:embed="rId3"/>
           <a:stretch>
             <a:fillRect/>
           </a:stretch>
@@ -8614,14 +8614,14 @@
       </p:sp>
       <p:pic>
         <p:nvPicPr>
-          <p:cNvPr id="6" name="Picture 5" descr="40b19a2288957a61.png"/>
+          <p:cNvPr id="6" name="Picture 5" descr="a65b1769f9d6366b.png"/>
           <p:cNvPicPr>
             <a:picLocks noChangeAspect="1"/>
           </p:cNvPicPr>
           <p:nvPr/>
         </p:nvPicPr>
         <p:blipFill>
-          <a:blip r:embed="rId2"/>
+          <a:blip r:embed="rId3"/>
           <a:stretch>
             <a:fillRect/>
           </a:stretch>

--- a/content/W01/D4/slides/C2_W01_D04_half2_STUDENT.pptx
+++ b/content/W01/D4/slides/C2_W01_D04_half2_STUDENT.pptx
@@ -3704,7 +3704,7 @@
       </p:sp>
       <p:pic>
         <p:nvPicPr>
-          <p:cNvPr id="6" name="Picture 5" descr="d064949aae10d69a.png"/>
+          <p:cNvPr id="6" name="Picture 5" descr="2d0e94ef669c202d.png"/>
           <p:cNvPicPr>
             <a:picLocks noChangeAspect="1"/>
           </p:cNvPicPr>
@@ -3718,8 +3718,8 @@
         </p:blipFill>
         <p:spPr>
           <a:xfrm>
-            <a:off x="685800" y="3152022"/>
-            <a:ext cx="4652640" cy="1376915"/>
+            <a:off x="685800" y="2933361"/>
+            <a:ext cx="4652640" cy="1814237"/>
           </a:xfrm>
           <a:prstGeom prst="rect">
             <a:avLst/>
@@ -4461,7 +4461,7 @@
       </p:sp>
       <p:pic>
         <p:nvPicPr>
-          <p:cNvPr id="6" name="Picture 5" descr="04f13dbeedb2d6e1.png"/>
+          <p:cNvPr id="6" name="Picture 5" descr="e10d18545db81ebf.png"/>
           <p:cNvPicPr>
             <a:picLocks noChangeAspect="1"/>
           </p:cNvPicPr>
@@ -4475,8 +4475,8 @@
         </p:blipFill>
         <p:spPr>
           <a:xfrm>
-            <a:off x="685800" y="2288975"/>
-            <a:ext cx="10820095" cy="2391810"/>
+            <a:off x="685800" y="2276252"/>
+            <a:ext cx="10820095" cy="2417255"/>
           </a:xfrm>
           <a:prstGeom prst="rect">
             <a:avLst/>
@@ -4491,7 +4491,7 @@
         </p:nvSpPr>
         <p:spPr>
           <a:xfrm>
-            <a:off x="685800" y="4827089"/>
+            <a:off x="685800" y="4839811"/>
             <a:ext cx="10820095" cy="564896"/>
           </a:xfrm>
           <a:prstGeom prst="rect">
@@ -6421,7 +6421,7 @@
       </p:sp>
       <p:pic>
         <p:nvPicPr>
-          <p:cNvPr id="6" name="Picture 5" descr="f62e1e1db556da6b.png"/>
+          <p:cNvPr id="6" name="Picture 5" descr="5dd1af4526e6513f.png"/>
           <p:cNvPicPr>
             <a:picLocks noChangeAspect="1"/>
           </p:cNvPicPr>
@@ -6435,8 +6435,8 @@
         </p:blipFill>
         <p:spPr>
           <a:xfrm>
-            <a:off x="685800" y="2931977"/>
-            <a:ext cx="10820095" cy="1105805"/>
+            <a:off x="685800" y="2908100"/>
+            <a:ext cx="10820095" cy="1153559"/>
           </a:xfrm>
           <a:prstGeom prst="rect">
             <a:avLst/>
@@ -6451,7 +6451,7 @@
         </p:nvSpPr>
         <p:spPr>
           <a:xfrm>
-            <a:off x="685800" y="4184086"/>
+            <a:off x="685800" y="4207963"/>
             <a:ext cx="10820095" cy="564896"/>
           </a:xfrm>
           <a:prstGeom prst="rect">

--- a/content/W01/D4/slides/C2_W01_D04_half2_STUDENT.pptx
+++ b/content/W01/D4/slides/C2_W01_D04_half2_STUDENT.pptx
@@ -832,7 +832,7 @@
           <a:lstStyle/>
           <a:p>
             <a:r>
-              <a:t>LIVE. Ten-minute break before this chapter. Pairs work from exercises/unguided/C2_W01_D04_second_case_STUDENT.md</a:t>
+              <a:t>LIVE. Ten-minute break before this chapter. Pairs work from exercises/unguided/C2_W01_D04_pushback_STUDENT.md</a:t>
             </a:r>
           </a:p>
           <a:p>
@@ -1372,7 +1372,7 @@
           </a:p>
           <a:p>
             <a:r>
-              <a:t>and the brief is exercises/unguided/C2_W01_D04_escalated_case_STUDENT.md. The support TA answers</a:t>
+              <a:t>and the brief is exercises/unguided/C2_W01_D04_escalated_STUDENT.md. The support TA answers</a:t>
             </a:r>
           </a:p>
           <a:p>

--- a/content/W01/D4/slides/C2_W01_D04_half2_STUDENT.pptx
+++ b/content/W01/D4/slides/C2_W01_D04_half2_STUDENT.pptx
@@ -620,12 +620,7 @@
           <a:lstStyle/>
           <a:p>
             <a:r>
-              <a:t>LIVE, 4 minutes. The first line is Retail-Plus, the second Retail-Core, from notebook 6, level 3.</a:t>
-            </a:r>
-          </a:p>
-          <a:p>
-            <a:r>
-              <a:t>Point at May to June: a fall of more than half, no campaign anywhere. A month's revenue on a few</a:t>
+              <a:t>LIVE, 4 minutes. Notebook 6, level 3, draws these two rows as lines. Point at May to June: a fall of more than half, no campaign anywhere. A month's revenue on a few</a:t>
             </a:r>
           </a:p>
           <a:p>
@@ -700,17 +695,17 @@
           <a:lstStyle/>
           <a:p>
             <a:r>
-              <a:t>LIVE, 3 minutes. The chance reference deals each of Retail-Plus's delivered Q2 orders to a month at</a:t>
-            </a:r>
-          </a:p>
-          <a:p>
-            <a:r>
-              <a:t>random, 5,000 times, and asks how often August takes at least 52.5 percent of the quarter. About 6</a:t>
-            </a:r>
-          </a:p>
-          <a:p>
-            <a:r>
-              <a:t>in 100: not rare. What changed: a 170 percent claim shrinks to "cannot tell from months".</a:t>
+              <a:t>LIVE, 3 minutes. The chance reference pools both segments' delivered Q2 orders and deals the segment</a:t>
+            </a:r>
+          </a:p>
+          <a:p>
+            <a:r>
+              <a:t>labels at random, 5,000 times, asking how often the two Augusts differ by four points or more either</a:t>
+            </a:r>
+          </a:p>
+          <a:p>
+            <a:r>
+              <a:t>way. About 8 in 10: no sign. What changed: a 170 percent claim shrinks to "no sign in the months".</a:t>
             </a:r>
           </a:p>
         </p:txBody>
@@ -1400,12 +1395,7 @@
           </a:p>
           <a:p>
             <a:r>
-              <a:t>and Kavya's review (1). Notebook 6 runs beside it. The chapter opener prints 06 because the</a:t>
-            </a:r>
-          </a:p>
-          <a:p>
-            <a:r>
-              <a:t>afternoon deck is renumbered after it is built; see the day sheet.</a:t>
+              <a:t>and Kavya's review (1). Notebook 6 runs beside it.</a:t>
             </a:r>
           </a:p>
         </p:txBody>
@@ -2535,12 +2525,12 @@
           <a:lstStyle/>
           <a:p>
             <a:r>
-              <a:t>LIVE, 9 minutes. Run kahoot/C2_W01_D04_quiz_STUDENT.md. Stop after item 2 and item 5 for thirty</a:t>
-            </a:r>
-          </a:p>
-          <a:p>
-            <a:r>
-              <a:t>seconds each; they are the two traps of the day.</a:t>
+              <a:t>LIVE, 9 minutes. Run kahoot/C2_W01_D04_quiz_STUDENT.md. Stop after item 2 and item 7 for thirty</a:t>
+            </a:r>
+          </a:p>
+          <a:p>
+            <a:r>
+              <a:t>seconds each: the p-value read as the chance of being wrong, and significance read as importance.</a:t>
             </a:r>
           </a:p>
         </p:txBody>
@@ -7119,30 +7109,505 @@
           </a:p>
         </p:txBody>
       </p:sp>
-      <p:pic>
-        <p:nvPicPr>
-          <p:cNvPr id="9" name="mermaid diagram" descr="e854c26afdaa81e5.png"/>
-          <p:cNvPicPr>
-            <a:picLocks noChangeAspect="1"/>
-          </p:cNvPicPr>
-          <p:nvPr/>
-        </p:nvPicPr>
-        <p:blipFill>
-          <a:blip r:embed="rId5"/>
-          <a:stretch>
-            <a:fillRect/>
-          </a:stretch>
-        </p:blipFill>
-        <p:spPr>
-          <a:xfrm>
-            <a:off x="2845155" y="1664208"/>
-            <a:ext cx="6501384" cy="3250692"/>
-          </a:xfrm>
-          <a:prstGeom prst="rect">
-            <a:avLst/>
-          </a:prstGeom>
-        </p:spPr>
-      </p:pic>
+      <p:graphicFrame>
+        <p:nvGraphicFramePr>
+          <p:cNvPr id="9" name="Table 8"/>
+          <p:cNvGraphicFramePr>
+            <a:graphicFrameLocks noGrp="1"/>
+          </p:cNvGraphicFramePr>
+          <p:nvPr/>
+        </p:nvGraphicFramePr>
+        <p:xfrm>
+          <a:off x="530352" y="1956816"/>
+          <a:ext cx="11130991" cy="1005840"/>
+        </p:xfrm>
+        <a:graphic>
+          <a:graphicData uri="http://schemas.openxmlformats.org/drawingml/2006/table">
+            <a:tbl>
+              <a:tblPr firstRow="0" bandRow="0">
+                <a:tableStyleId>{2D5ABB26-0587-4C30-8999-92F81FD0307C}</a:tableStyleId>
+              </a:tblPr>
+              <a:tblGrid>
+                <a:gridCol w="5644591"/>
+                <a:gridCol w="914400"/>
+                <a:gridCol w="914400"/>
+                <a:gridCol w="914400"/>
+                <a:gridCol w="914400"/>
+                <a:gridCol w="914400"/>
+                <a:gridCol w="914400"/>
+              </a:tblGrid>
+              <a:tr h="335280">
+                <a:tc>
+                  <a:txBody>
+                    <a:bodyPr/>
+                    <a:lstStyle/>
+                    <a:p>
+                      <a:r>
+                        <a:rPr sz="1250" b="1" i="0">
+                          <a:solidFill>
+                            <a:srgbClr val="FFFFFF"/>
+                          </a:solidFill>
+                          <a:latin typeface="Calibri"/>
+                        </a:rPr>
+                        <a:t>Delivered, Rs</a:t>
+                      </a:r>
+                    </a:p>
+                  </a:txBody>
+                  <a:tcPr marL="101600" marR="101600" marT="38100" marB="38100" anchor="ctr">
+                    <a:solidFill>
+                      <a:srgbClr val="1A0F5C"/>
+                    </a:solidFill>
+                  </a:tcPr>
+                </a:tc>
+                <a:tc>
+                  <a:txBody>
+                    <a:bodyPr/>
+                    <a:lstStyle/>
+                    <a:p>
+                      <a:r>
+                        <a:rPr sz="1250" b="1" i="0">
+                          <a:solidFill>
+                            <a:srgbClr val="FFFFFF"/>
+                          </a:solidFill>
+                          <a:latin typeface="Calibri"/>
+                        </a:rPr>
+                        <a:t>Apr</a:t>
+                      </a:r>
+                    </a:p>
+                  </a:txBody>
+                  <a:tcPr marL="101600" marR="101600" marT="38100" marB="38100" anchor="ctr">
+                    <a:solidFill>
+                      <a:srgbClr val="1A0F5C"/>
+                    </a:solidFill>
+                  </a:tcPr>
+                </a:tc>
+                <a:tc>
+                  <a:txBody>
+                    <a:bodyPr/>
+                    <a:lstStyle/>
+                    <a:p>
+                      <a:r>
+                        <a:rPr sz="1250" b="1" i="0">
+                          <a:solidFill>
+                            <a:srgbClr val="FFFFFF"/>
+                          </a:solidFill>
+                          <a:latin typeface="Calibri"/>
+                        </a:rPr>
+                        <a:t>May</a:t>
+                      </a:r>
+                    </a:p>
+                  </a:txBody>
+                  <a:tcPr marL="101600" marR="101600" marT="38100" marB="38100" anchor="ctr">
+                    <a:solidFill>
+                      <a:srgbClr val="1A0F5C"/>
+                    </a:solidFill>
+                  </a:tcPr>
+                </a:tc>
+                <a:tc>
+                  <a:txBody>
+                    <a:bodyPr/>
+                    <a:lstStyle/>
+                    <a:p>
+                      <a:r>
+                        <a:rPr sz="1250" b="1" i="0">
+                          <a:solidFill>
+                            <a:srgbClr val="FFFFFF"/>
+                          </a:solidFill>
+                          <a:latin typeface="Calibri"/>
+                        </a:rPr>
+                        <a:t>Jun</a:t>
+                      </a:r>
+                    </a:p>
+                  </a:txBody>
+                  <a:tcPr marL="101600" marR="101600" marT="38100" marB="38100" anchor="ctr">
+                    <a:solidFill>
+                      <a:srgbClr val="1A0F5C"/>
+                    </a:solidFill>
+                  </a:tcPr>
+                </a:tc>
+                <a:tc>
+                  <a:txBody>
+                    <a:bodyPr/>
+                    <a:lstStyle/>
+                    <a:p>
+                      <a:r>
+                        <a:rPr sz="1250" b="1" i="0">
+                          <a:solidFill>
+                            <a:srgbClr val="FFFFFF"/>
+                          </a:solidFill>
+                          <a:latin typeface="Calibri"/>
+                        </a:rPr>
+                        <a:t>Jul</a:t>
+                      </a:r>
+                    </a:p>
+                  </a:txBody>
+                  <a:tcPr marL="101600" marR="101600" marT="38100" marB="38100" anchor="ctr">
+                    <a:solidFill>
+                      <a:srgbClr val="1A0F5C"/>
+                    </a:solidFill>
+                  </a:tcPr>
+                </a:tc>
+                <a:tc>
+                  <a:txBody>
+                    <a:bodyPr/>
+                    <a:lstStyle/>
+                    <a:p>
+                      <a:r>
+                        <a:rPr sz="1250" b="1" i="0">
+                          <a:solidFill>
+                            <a:srgbClr val="FFFFFF"/>
+                          </a:solidFill>
+                          <a:latin typeface="Calibri"/>
+                        </a:rPr>
+                        <a:t>Aug</a:t>
+                      </a:r>
+                    </a:p>
+                  </a:txBody>
+                  <a:tcPr marL="101600" marR="101600" marT="38100" marB="38100" anchor="ctr">
+                    <a:solidFill>
+                      <a:srgbClr val="1A0F5C"/>
+                    </a:solidFill>
+                  </a:tcPr>
+                </a:tc>
+                <a:tc>
+                  <a:txBody>
+                    <a:bodyPr/>
+                    <a:lstStyle/>
+                    <a:p>
+                      <a:r>
+                        <a:rPr sz="1250" b="1" i="0">
+                          <a:solidFill>
+                            <a:srgbClr val="FFFFFF"/>
+                          </a:solidFill>
+                          <a:latin typeface="Calibri"/>
+                        </a:rPr>
+                        <a:t>Sep</a:t>
+                      </a:r>
+                    </a:p>
+                  </a:txBody>
+                  <a:tcPr marL="101600" marR="101600" marT="38100" marB="38100" anchor="ctr">
+                    <a:solidFill>
+                      <a:srgbClr val="1A0F5C"/>
+                    </a:solidFill>
+                  </a:tcPr>
+                </a:tc>
+              </a:tr>
+              <a:tr h="335280">
+                <a:tc>
+                  <a:txBody>
+                    <a:bodyPr/>
+                    <a:lstStyle/>
+                    <a:p>
+                      <a:r>
+                        <a:rPr sz="1200" b="0" i="0">
+                          <a:solidFill>
+                            <a:srgbClr val="1A1440"/>
+                          </a:solidFill>
+                          <a:latin typeface="Calibri"/>
+                        </a:rPr>
+                        <a:t>Retail-Plus, targeted</a:t>
+                      </a:r>
+                    </a:p>
+                  </a:txBody>
+                  <a:tcPr marL="101600" marR="101600" marT="38100" marB="38100" anchor="ctr">
+                    <a:solidFill>
+                      <a:srgbClr val="FFFFFF"/>
+                    </a:solidFill>
+                  </a:tcPr>
+                </a:tc>
+                <a:tc>
+                  <a:txBody>
+                    <a:bodyPr/>
+                    <a:lstStyle/>
+                    <a:p>
+                      <a:r>
+                        <a:rPr sz="1200" b="0" i="0">
+                          <a:solidFill>
+                            <a:srgbClr val="1A1440"/>
+                          </a:solidFill>
+                          <a:latin typeface="Calibri"/>
+                        </a:rPr>
+                        <a:t>19,650</a:t>
+                      </a:r>
+                    </a:p>
+                  </a:txBody>
+                  <a:tcPr marL="101600" marR="101600" marT="38100" marB="38100" anchor="ctr">
+                    <a:solidFill>
+                      <a:srgbClr val="FFFFFF"/>
+                    </a:solidFill>
+                  </a:tcPr>
+                </a:tc>
+                <a:tc>
+                  <a:txBody>
+                    <a:bodyPr/>
+                    <a:lstStyle/>
+                    <a:p>
+                      <a:r>
+                        <a:rPr sz="1200" b="0" i="0">
+                          <a:solidFill>
+                            <a:srgbClr val="1A1440"/>
+                          </a:solidFill>
+                          <a:latin typeface="Calibri"/>
+                        </a:rPr>
+                        <a:t>36,840</a:t>
+                      </a:r>
+                    </a:p>
+                  </a:txBody>
+                  <a:tcPr marL="101600" marR="101600" marT="38100" marB="38100" anchor="ctr">
+                    <a:solidFill>
+                      <a:srgbClr val="FFFFFF"/>
+                    </a:solidFill>
+                  </a:tcPr>
+                </a:tc>
+                <a:tc>
+                  <a:txBody>
+                    <a:bodyPr/>
+                    <a:lstStyle/>
+                    <a:p>
+                      <a:r>
+                        <a:rPr sz="1200" b="0" i="0">
+                          <a:solidFill>
+                            <a:srgbClr val="1A1440"/>
+                          </a:solidFill>
+                          <a:latin typeface="Calibri"/>
+                        </a:rPr>
+                        <a:t>15,640</a:t>
+                      </a:r>
+                    </a:p>
+                  </a:txBody>
+                  <a:tcPr marL="101600" marR="101600" marT="38100" marB="38100" anchor="ctr">
+                    <a:solidFill>
+                      <a:srgbClr val="FFFFFF"/>
+                    </a:solidFill>
+                  </a:tcPr>
+                </a:tc>
+                <a:tc>
+                  <a:txBody>
+                    <a:bodyPr/>
+                    <a:lstStyle/>
+                    <a:p>
+                      <a:r>
+                        <a:rPr sz="1200" b="0" i="0">
+                          <a:solidFill>
+                            <a:srgbClr val="1A1440"/>
+                          </a:solidFill>
+                          <a:latin typeface="Calibri"/>
+                        </a:rPr>
+                        <a:t>9,280</a:t>
+                      </a:r>
+                    </a:p>
+                  </a:txBody>
+                  <a:tcPr marL="101600" marR="101600" marT="38100" marB="38100" anchor="ctr">
+                    <a:solidFill>
+                      <a:srgbClr val="FFFFFF"/>
+                    </a:solidFill>
+                  </a:tcPr>
+                </a:tc>
+                <a:tc>
+                  <a:txBody>
+                    <a:bodyPr/>
+                    <a:lstStyle/>
+                    <a:p>
+                      <a:r>
+                        <a:rPr sz="1200" b="0" i="0">
+                          <a:solidFill>
+                            <a:srgbClr val="1A1440"/>
+                          </a:solidFill>
+                          <a:latin typeface="Calibri"/>
+                        </a:rPr>
+                        <a:t>25,060</a:t>
+                      </a:r>
+                    </a:p>
+                  </a:txBody>
+                  <a:tcPr marL="101600" marR="101600" marT="38100" marB="38100" anchor="ctr">
+                    <a:solidFill>
+                      <a:srgbClr val="FFFFFF"/>
+                    </a:solidFill>
+                  </a:tcPr>
+                </a:tc>
+                <a:tc>
+                  <a:txBody>
+                    <a:bodyPr/>
+                    <a:lstStyle/>
+                    <a:p>
+                      <a:r>
+                        <a:rPr sz="1200" b="0" i="0">
+                          <a:solidFill>
+                            <a:srgbClr val="1A1440"/>
+                          </a:solidFill>
+                          <a:latin typeface="Calibri"/>
+                        </a:rPr>
+                        <a:t>13,370</a:t>
+                      </a:r>
+                    </a:p>
+                  </a:txBody>
+                  <a:tcPr marL="101600" marR="101600" marT="38100" marB="38100" anchor="ctr">
+                    <a:solidFill>
+                      <a:srgbClr val="FFFFFF"/>
+                    </a:solidFill>
+                  </a:tcPr>
+                </a:tc>
+              </a:tr>
+              <a:tr h="335280">
+                <a:tc>
+                  <a:txBody>
+                    <a:bodyPr/>
+                    <a:lstStyle/>
+                    <a:p>
+                      <a:r>
+                        <a:rPr sz="1200" b="0" i="0">
+                          <a:solidFill>
+                            <a:srgbClr val="1A1440"/>
+                          </a:solidFill>
+                          <a:latin typeface="Calibri"/>
+                        </a:rPr>
+                        <a:t>Retail-Core, not targeted</a:t>
+                      </a:r>
+                    </a:p>
+                  </a:txBody>
+                  <a:tcPr marL="101600" marR="101600" marT="38100" marB="38100" anchor="ctr">
+                    <a:solidFill>
+                      <a:srgbClr val="F4F2FA"/>
+                    </a:solidFill>
+                  </a:tcPr>
+                </a:tc>
+                <a:tc>
+                  <a:txBody>
+                    <a:bodyPr/>
+                    <a:lstStyle/>
+                    <a:p>
+                      <a:r>
+                        <a:rPr sz="1200" b="0" i="0">
+                          <a:solidFill>
+                            <a:srgbClr val="1A1440"/>
+                          </a:solidFill>
+                          <a:latin typeface="Calibri"/>
+                        </a:rPr>
+                        <a:t>11,920</a:t>
+                      </a:r>
+                    </a:p>
+                  </a:txBody>
+                  <a:tcPr marL="101600" marR="101600" marT="38100" marB="38100" anchor="ctr">
+                    <a:solidFill>
+                      <a:srgbClr val="F4F2FA"/>
+                    </a:solidFill>
+                  </a:tcPr>
+                </a:tc>
+                <a:tc>
+                  <a:txBody>
+                    <a:bodyPr/>
+                    <a:lstStyle/>
+                    <a:p>
+                      <a:r>
+                        <a:rPr sz="1200" b="0" i="0">
+                          <a:solidFill>
+                            <a:srgbClr val="1A1440"/>
+                          </a:solidFill>
+                          <a:latin typeface="Calibri"/>
+                        </a:rPr>
+                        <a:t>15,000</a:t>
+                      </a:r>
+                    </a:p>
+                  </a:txBody>
+                  <a:tcPr marL="101600" marR="101600" marT="38100" marB="38100" anchor="ctr">
+                    <a:solidFill>
+                      <a:srgbClr val="F4F2FA"/>
+                    </a:solidFill>
+                  </a:tcPr>
+                </a:tc>
+                <a:tc>
+                  <a:txBody>
+                    <a:bodyPr/>
+                    <a:lstStyle/>
+                    <a:p>
+                      <a:r>
+                        <a:rPr sz="1200" b="0" i="0">
+                          <a:solidFill>
+                            <a:srgbClr val="1A1440"/>
+                          </a:solidFill>
+                          <a:latin typeface="Calibri"/>
+                        </a:rPr>
+                        <a:t>24,380</a:t>
+                      </a:r>
+                    </a:p>
+                  </a:txBody>
+                  <a:tcPr marL="101600" marR="101600" marT="38100" marB="38100" anchor="ctr">
+                    <a:solidFill>
+                      <a:srgbClr val="F4F2FA"/>
+                    </a:solidFill>
+                  </a:tcPr>
+                </a:tc>
+                <a:tc>
+                  <a:txBody>
+                    <a:bodyPr/>
+                    <a:lstStyle/>
+                    <a:p>
+                      <a:r>
+                        <a:rPr sz="1200" b="0" i="0">
+                          <a:solidFill>
+                            <a:srgbClr val="1A1440"/>
+                          </a:solidFill>
+                          <a:latin typeface="Calibri"/>
+                        </a:rPr>
+                        <a:t>13,320</a:t>
+                      </a:r>
+                    </a:p>
+                  </a:txBody>
+                  <a:tcPr marL="101600" marR="101600" marT="38100" marB="38100" anchor="ctr">
+                    <a:solidFill>
+                      <a:srgbClr val="F4F2FA"/>
+                    </a:solidFill>
+                  </a:tcPr>
+                </a:tc>
+                <a:tc>
+                  <a:txBody>
+                    <a:bodyPr/>
+                    <a:lstStyle/>
+                    <a:p>
+                      <a:r>
+                        <a:rPr sz="1200" b="0" i="0">
+                          <a:solidFill>
+                            <a:srgbClr val="1A1440"/>
+                          </a:solidFill>
+                          <a:latin typeface="Calibri"/>
+                        </a:rPr>
+                        <a:t>23,090</a:t>
+                      </a:r>
+                    </a:p>
+                  </a:txBody>
+                  <a:tcPr marL="101600" marR="101600" marT="38100" marB="38100" anchor="ctr">
+                    <a:solidFill>
+                      <a:srgbClr val="F4F2FA"/>
+                    </a:solidFill>
+                  </a:tcPr>
+                </a:tc>
+                <a:tc>
+                  <a:txBody>
+                    <a:bodyPr/>
+                    <a:lstStyle/>
+                    <a:p>
+                      <a:r>
+                        <a:rPr sz="1200" b="0" i="0">
+                          <a:solidFill>
+                            <a:srgbClr val="1A1440"/>
+                          </a:solidFill>
+                          <a:latin typeface="Calibri"/>
+                        </a:rPr>
+                        <a:t>11,140</a:t>
+                      </a:r>
+                    </a:p>
+                  </a:txBody>
+                  <a:tcPr marL="101600" marR="101600" marT="38100" marB="38100" anchor="ctr">
+                    <a:solidFill>
+                      <a:srgbClr val="F4F2FA"/>
+                    </a:solidFill>
+                  </a:tcPr>
+                </a:tc>
+              </a:tr>
+            </a:tbl>
+          </a:graphicData>
+        </a:graphic>
+      </p:graphicFrame>
       <p:sp>
         <p:nvSpPr>
           <p:cNvPr id="10" name="Rounded Rectangle 9"/>
@@ -7151,7 +7616,7 @@
         </p:nvSpPr>
         <p:spPr>
           <a:xfrm>
-            <a:off x="530352" y="4960620"/>
+            <a:off x="530352" y="3218688"/>
             <a:ext cx="11130991" cy="1074420"/>
           </a:xfrm>
           <a:prstGeom prst="roundRect">
@@ -7199,7 +7664,7 @@
         </p:nvSpPr>
         <p:spPr>
           <a:xfrm>
-            <a:off x="676656" y="5088636"/>
+            <a:off x="676656" y="3346704"/>
             <a:ext cx="45720" cy="818388"/>
           </a:xfrm>
           <a:prstGeom prst="roundRect">
@@ -7245,7 +7710,7 @@
         </p:nvSpPr>
         <p:spPr>
           <a:xfrm>
-            <a:off x="877824" y="5079492"/>
+            <a:off x="877824" y="3337560"/>
             <a:ext cx="10564063" cy="891540"/>
           </a:xfrm>
           <a:prstGeom prst="rect">
@@ -8358,7 +8823,7 @@
                 </a:solidFill>
                 <a:latin typeface="Georgia"/>
               </a:rPr>
-              <a:t>6 in 100</a:t>
+              <a:t>8 in 10</a:t>
             </a:r>
           </a:p>
         </p:txBody>
@@ -8428,7 +8893,7 @@
                 </a:solidFill>
                 <a:latin typeface="Calibri"/>
               </a:rPr>
-              <a:t>deals that give Retail-Plus's August that share</a:t>
+              <a:t>label shuffles that make a 4-point gap either way</a:t>
             </a:r>
           </a:p>
         </p:txBody>
@@ -8511,7 +8976,7 @@
                 </a:solidFill>
                 <a:latin typeface="Calibri"/>
               </a:rPr>
-              <a:t>The 170 percent becomes an August four points busier than the untargeted segment's, a gap chance alone reaches often enough. The month file cannot separate the sale from a busy August.</a:t>
+              <a:t>The 170 percent becomes an August four points busier than the untargeted segment's, a gap chance makes most of the time. The months show no sign of the sale beyond a busy August for everyone.</a:t>
             </a:r>
           </a:p>
         </p:txBody>
@@ -9268,7 +9733,7 @@
       </p:sp>
       <p:pic>
         <p:nvPicPr>
-          <p:cNvPr id="9" name="mermaid diagram" descr="2b7ad7b778984687.png"/>
+          <p:cNvPr id="9" name="mermaid diagram" descr="6f8f5956c994e8e8.png"/>
           <p:cNvPicPr>
             <a:picLocks noChangeAspect="1"/>
           </p:cNvPicPr>
@@ -9282,8 +9747,8 @@
         </p:blipFill>
         <p:spPr>
           <a:xfrm>
-            <a:off x="1674537" y="1682496"/>
-            <a:ext cx="2497955" cy="4517136"/>
+            <a:off x="530352" y="1956816"/>
+            <a:ext cx="11130991" cy="2092677"/>
           </a:xfrm>
           <a:prstGeom prst="rect">
             <a:avLst/>
@@ -9298,8 +9763,8 @@
         </p:nvSpPr>
         <p:spPr>
           <a:xfrm>
-            <a:off x="5761917" y="1956816"/>
-            <a:ext cx="5899425" cy="1074420"/>
+            <a:off x="530352" y="4195797"/>
+            <a:ext cx="11130991" cy="1074420"/>
           </a:xfrm>
           <a:prstGeom prst="roundRect">
             <a:avLst>
@@ -9346,7 +9811,7 @@
         </p:nvSpPr>
         <p:spPr>
           <a:xfrm>
-            <a:off x="5908221" y="2084832"/>
+            <a:off x="676656" y="4323813"/>
             <a:ext cx="45720" cy="818388"/>
           </a:xfrm>
           <a:prstGeom prst="roundRect">
@@ -9392,8 +9857,8 @@
         </p:nvSpPr>
         <p:spPr>
           <a:xfrm>
-            <a:off x="6109389" y="2075688"/>
-            <a:ext cx="5332497" cy="891540"/>
+            <a:off x="877824" y="4314669"/>
+            <a:ext cx="10564063" cy="891540"/>
           </a:xfrm>
           <a:prstGeom prst="rect">
             <a:avLst/>
@@ -9413,7 +9878,7 @@
                 </a:solidFill>
                 <a:latin typeface="Calibri"/>
               </a:rPr>
-              <a:t>The price of knowing. </a:t>
+              <a:t>The cost of the hold-back. </a:t>
             </a:r>
             <a:r>
               <a:rPr sz="1500" b="0" i="0">
@@ -9422,7 +9887,7 @@
                 </a:solidFill>
                 <a:latin typeface="Calibri"/>
               </a:rPr>
-              <a:t>Holding back 14 of 70 Retail-Plus customers at Marketing's own 6 percent lift forgoes about Rs 4,200, and nothing if the lift is not real.</a:t>
+              <a:t>Holding back 14 of 70 Retail-Plus customers at Marketing's own 6 percent lift forgoes about Rs 4,200, and nothing if the lift is not real. Fourteen are too few to see a 6 percent lift; sizing the hold-back is a question of power, which comes later.</a:t>
             </a:r>
           </a:p>
         </p:txBody>
@@ -10303,7 +10768,7 @@
                           </a:solidFill>
                           <a:latin typeface="Calibri"/>
                         </a:rPr>
-                        <a:t>August's share 4 points higher, chance makes that about 6 in 100</a:t>
+                        <a:t>August's share 4 points higher, which the label shuffle makes about 8 times in 10</a:t>
                       </a:r>
                     </a:p>
                   </a:txBody>
@@ -10325,7 +10790,7 @@
                           </a:solidFill>
                           <a:latin typeface="Calibri"/>
                         </a:rPr>
-                        <a:t>Cannot tell</a:t>
+                        <a:t>No sign of the sale</a:t>
                       </a:r>
                     </a:p>
                   </a:txBody>
@@ -11297,7 +11762,7 @@
       </p:sp>
       <p:pic>
         <p:nvPicPr>
-          <p:cNvPr id="9" name="mermaid diagram" descr="75548508a7901396.png"/>
+          <p:cNvPr id="9" name="mermaid diagram" descr="111d5a52647ef440.png"/>
           <p:cNvPicPr>
             <a:picLocks noChangeAspect="1"/>
           </p:cNvPicPr>
@@ -11505,7 +11970,7 @@
                 </a:solidFill>
                 <a:latin typeface="Calibri"/>
               </a:rPr>
-              <a:t>Two routes find no lift, and you priced the test that would settle it. Take that to Marketing as an offer, never as a verdict on their work.</a:t>
+              <a:t>Two routes find no lift, and you priced the hold-back and said what it cannot yet size. Take that to Marketing as an offer, never as a verdict on their work.</a:t>
             </a:r>
           </a:p>
         </p:txBody>

--- a/content/W01/D4/slides/C2_W01_D04_half2_STUDENT.pptx
+++ b/content/W01/D4/slides/C2_W01_D04_half2_STUDENT.pptx
@@ -7461,7 +7461,7 @@
                           </a:solidFill>
                           <a:latin typeface="Calibri"/>
                         </a:rPr>
-                        <a:t>Retail-Core, not targeted</a:t>
+                        <a:t>Retail-Core, not aimed at</a:t>
                       </a:r>
                     </a:p>
                   </a:txBody>
@@ -7740,7 +7740,7 @@
                 </a:solidFill>
                 <a:latin typeface="Calibri"/>
               </a:rPr>
-              <a:t>Retail-Core, the segment the sale was not aimed at, rose 73 percent from July to August. Retail-Plus fell 58 percent from May to June with no sale running. July's Retail-Plus figure stands on 4 delivered orders.</a:t>
+              <a:t>Retail-Core, the segment the sale was not aimed at (though the extract shows it reached some Retail-Core customers), rose 73 percent from July to August. Retail-Plus fell 58 percent from May to June with no sale running. July's Retail-Plus figure stands on 4 delivered orders.</a:t>
             </a:r>
           </a:p>
         </p:txBody>
@@ -8744,7 +8744,7 @@
                 </a:solidFill>
                 <a:latin typeface="Calibri"/>
               </a:rPr>
-              <a:t>August's share of its Q2, not targeted</a:t>
+              <a:t>August's share of its Q2, not aimed at</a:t>
             </a:r>
           </a:p>
         </p:txBody>
@@ -10652,7 +10652,7 @@
         </p:nvGraphicFramePr>
         <p:xfrm>
           <a:off x="530352" y="1956816"/>
-          <a:ext cx="11130989" cy="1593088"/>
+          <a:ext cx="11130991" cy="1593088"/>
         </p:xfrm>
         <a:graphic>
           <a:graphicData uri="http://schemas.openxmlformats.org/drawingml/2006/table">
@@ -10661,9 +10661,9 @@
                 <a:tableStyleId>{2D5ABB26-0587-4C30-8999-92F81FD0307C}</a:tableStyleId>
               </a:tblPr>
               <a:tblGrid>
-                <a:gridCol w="2924602"/>
-                <a:gridCol w="5462399"/>
-                <a:gridCol w="2743988"/>
+                <a:gridCol w="2350551"/>
+                <a:gridCol w="4390220"/>
+                <a:gridCol w="4390220"/>
               </a:tblGrid>
               <a:tr h="369824">
                 <a:tc>
@@ -10790,7 +10790,7 @@
                           </a:solidFill>
                           <a:latin typeface="Calibri"/>
                         </a:rPr>
-                        <a:t>No sign of the sale</a:t>
+                        <a:t>No sign; Retail-Core was partly reached, so it is an imperfect comparison</a:t>
                       </a:r>
                     </a:p>
                   </a:txBody>

--- a/content/W01/D4/slides/C2_W01_D04_half2_STUDENT.pptx
+++ b/content/W01/D4/slides/C2_W01_D04_half2_STUDENT.pptx
@@ -620,12 +620,12 @@
           <a:lstStyle/>
           <a:p>
             <a:r>
-              <a:t>LIVE, 4 minutes. Notebook 6, level 3, draws these two rows as lines. Point at May to June: a fall of more than half, no campaign anywhere. A month's revenue on a few</a:t>
-            </a:r>
-          </a:p>
-          <a:p>
-            <a:r>
-              <a:t>orders swings by half on its own.</a:t>
+              <a:t>LIVE, 4 minutes. Notebook 6, level 3, draws these two rows as lines. Point at May to June: a fall of</a:t>
+            </a:r>
+          </a:p>
+          <a:p>
+            <a:r>
+              <a:t>more than half, no campaign anywhere. A month's revenue on a few orders swings by half on its own.</a:t>
             </a:r>
           </a:p>
         </p:txBody>
@@ -695,17 +695,27 @@
           <a:lstStyle/>
           <a:p>
             <a:r>
-              <a:t>LIVE, 3 minutes. The chance reference pools both segments' delivered Q2 orders and deals the segment</a:t>
-            </a:r>
-          </a:p>
-          <a:p>
-            <a:r>
-              <a:t>labels at random, 5,000 times, asking how often the two Augusts differ by four points or more either</a:t>
-            </a:r>
-          </a:p>
-          <a:p>
-            <a:r>
-              <a:t>way. About 8 in 10: no sign. What changed: a 170 percent claim shrinks to "no sign in the months".</a:t>
+              <a:t>LIVE, 3 minutes. These are different customers in each segment, so the chance reference shuffles the</a:t>
+            </a:r>
+          </a:p>
+          <a:p>
+            <a:r>
+              <a:t>segment labels across both segments' delivered Q2 orders, 5,000 times. As in chapter 1, both</a:t>
+            </a:r>
+          </a:p>
+          <a:p>
+            <a:r>
+              <a:t>directions are reported, since neither was fixed before August was seen: 0.82 either way, 0.40 for a</a:t>
+            </a:r>
+          </a:p>
+          <a:p>
+            <a:r>
+              <a:t>Retail-Plus share that much higher. What changed: a 170 percent claim shrinks to "no sign in the</a:t>
+            </a:r>
+          </a:p>
+          <a:p>
+            <a:r>
+              <a:t>months".</a:t>
             </a:r>
           </a:p>
         </p:txBody>
@@ -775,17 +785,42 @@
           <a:lstStyle/>
           <a:p>
             <a:r>
-              <a:t>LIVE, 4 minutes. Name it as a held-back group, or a holdout; experiment design proper comes later in</a:t>
-            </a:r>
-          </a:p>
-          <a:p>
-            <a:r>
-              <a:t>the programme. Chance decides who gets the sale, so the groups are alike in everything else on</a:t>
-            </a:r>
-          </a:p>
-          <a:p>
-            <a:r>
-              <a:t>average, including who was going to buy anyway.</a:t>
+              <a:t>LIVE, 4 minutes. Meet the two lists head-on. The morning offered the retention test to "the whole</a:t>
+            </a:r>
+          </a:p>
+          <a:p>
+            <a:r>
+              <a:t>tier" of 22, and this hold-back takes 14 of 70. Both are right: the 22 are Finance's order file, where</a:t>
+            </a:r>
+          </a:p>
+          <a:p>
+            <a:r>
+              <a:t>Retail-Plus members delivered about Rs 1,139 each in August; the 70 are the platform's list, where</a:t>
+            </a:r>
+          </a:p>
+          <a:p>
+            <a:r>
+              <a:t>Retail-Plus customers who did not get the sale averaged Rs 5,000. Different ids and different</a:t>
+            </a:r>
+          </a:p>
+          <a:p>
+            <a:r>
+              <a:t>measures, delivered revenue per member against the platform's average spend, so neither checks the</a:t>
+            </a:r>
+          </a:p>
+          <a:p>
+            <a:r>
+              <a:t>other. Fourteen are too few to see a 6 percent lift; sizing a hold-back is power, which comes later.</a:t>
+            </a:r>
+          </a:p>
+          <a:p>
+            <a:r>
+              <a:t>Chance decides who gets the sale, so the groups are alike in everything else on average, including</a:t>
+            </a:r>
+          </a:p>
+          <a:p>
+            <a:r>
+              <a:t>who was going to buy anyway.</a:t>
             </a:r>
           </a:p>
         </p:txBody>
@@ -855,17 +890,27 @@
           <a:lstStyle/>
           <a:p>
             <a:r>
-              <a:t>LIVE, 2 minutes. Neither route shows the lift Marketing claimed, and neither is a fair comparison,</a:t>
-            </a:r>
-          </a:p>
-          <a:p>
-            <a:r>
-              <a:t>because nobody tossed a coin. That is why the line stays "do not repeat it as designed" and the</a:t>
-            </a:r>
-          </a:p>
-          <a:p>
-            <a:r>
-              <a:t>action is the hold-back.</a:t>
+              <a:t>LIVE, 2 minutes. Notebook 6's second route, a placebo: the same month-share test on a different</a:t>
+            </a:r>
+          </a:p>
+          <a:p>
+            <a:r>
+              <a:t>quarter of Finance's file, sharing nothing with chapter 4's split. Shuffled labels make May's and</a:t>
+            </a:r>
+          </a:p>
+          <a:p>
+            <a:r>
+              <a:t>June's gaps in about 15 and 7 deals in 100 counting either way. Chapter 4's split found 3 percent</a:t>
+            </a:r>
+          </a:p>
+          <a:p>
+            <a:r>
+              <a:t>less in both segments; neither route shows the lift Marketing claimed, and neither is a fair</a:t>
+            </a:r>
+          </a:p>
+          <a:p>
+            <a:r>
+              <a:t>comparison, because nobody tossed a coin. That is why the action is the hold-back.</a:t>
             </a:r>
           </a:p>
         </p:txBody>
@@ -1095,7 +1140,12 @@
           </a:p>
           <a:p>
             <a:r>
-              <a:t>fast, with twelve choices to make in the notebook and a note to write at the end. Start the clock.</a:t>
+              <a:t>fast, with twelve choices to make in the notebook and a note to write at the end. Each check cell</a:t>
+            </a:r>
+          </a:p>
+          <a:p>
+            <a:r>
+              <a:t>compares the learner's numbers with the numbers they should reach. Start the clock.</a:t>
             </a:r>
           </a:p>
         </p:txBody>
@@ -1845,17 +1895,17 @@
           <a:lstStyle/>
           <a:p>
             <a:r>
-              <a:t>LIVE, 3 minutes. The campaigns table records 15 percent off; the break-even is Monday's companion</a:t>
-            </a:r>
-          </a:p>
-          <a:p>
-            <a:r>
-              <a:t>experiment C. The exposure table does not say whether August revenue is before or after the</a:t>
-            </a:r>
-          </a:p>
-          <a:p>
-            <a:r>
-              <a:t>discount, and the pair should list that as a question for Marketing rather than assume it.</a:t>
+              <a:t>LIVE, 3 minutes. The campaigns table records 15 percent off. The platform's list does not say</a:t>
+            </a:r>
+          </a:p>
+          <a:p>
+            <a:r>
+              <a:t>whether its August spend is before or after the discount; the pair sizes it both ways and lists the</a:t>
+            </a:r>
+          </a:p>
+          <a:p>
+            <a:r>
+              <a:t>question for Marketing rather than assuming it. Notebook ex2, move 4, computes the 9.8 percent.</a:t>
             </a:r>
           </a:p>
         </p:txBody>
@@ -2080,12 +2130,17 @@
           </a:p>
           <a:p>
             <a:r>
-              <a:t>it on this file, and names the fact that would switch it. The last one is recognition only: one in</a:t>
-            </a:r>
-          </a:p>
-          <a:p>
-            <a:r>
-              <a:t>twenty chance-only tests reaches 0.05 by itself.</a:t>
+              <a:t>it on this file, and names the fact that would switch it, including the design of the data (the same</a:t>
+            </a:r>
+          </a:p>
+          <a:p>
+            <a:r>
+              <a:t>customers twice, or different customers). The last one is recognition only: about one in twenty</a:t>
+            </a:r>
+          </a:p>
+          <a:p>
+            <a:r>
+              <a:t>chance-only tests reaches 0.05 by itself.</a:t>
             </a:r>
           </a:p>
         </p:txBody>
@@ -2600,12 +2655,17 @@
           <a:lstStyle/>
           <a:p>
             <a:r>
-              <a:t>LIVE, 2 minutes. Do not preview the lab's file or its defects. Say tonight's take-home and the</a:t>
-            </a:r>
-          </a:p>
-          <a:p>
-            <a:r>
-              <a:t>pre-read, and that the note is read aloud to someone outside the programme before Friday.</a:t>
+              <a:t>LIVE, 2 minutes. Kavya takes Friday, as the pre-read tells the room. Do not preview the lab's file or</a:t>
+            </a:r>
+          </a:p>
+          <a:p>
+            <a:r>
+              <a:t>its defects. Say tonight's take-home and the pre-read, and that the note is read aloud to someone</a:t>
+            </a:r>
+          </a:p>
+          <a:p>
+            <a:r>
+              <a:t>outside the programme before Friday.</a:t>
             </a:r>
           </a:p>
         </p:txBody>
@@ -2680,12 +2740,17 @@
           </a:p>
           <a:p>
             <a:r>
-              <a:t>the paper: "brand-keyword ads have no measurable short-term benefits"; "almost all of the forgone</a:t>
-            </a:r>
-          </a:p>
-          <a:p>
-            <a:r>
-              <a:t>click traffic and attributed sales were captured by natural search".</a:t>
+              <a:t>the abstract: "brand-keyword ads have no measurable short-term benefits"; "returns from paid search</a:t>
+            </a:r>
+          </a:p>
+          <a:p>
+            <a:r>
+              <a:t>are a fraction of conventional non-experimental estimates". The same paper's split by customer type</a:t>
+            </a:r>
+          </a:p>
+          <a:p>
+            <a:r>
+              <a:t>was chapter 4's company case.</a:t>
             </a:r>
           </a:p>
         </p:txBody>
@@ -2760,7 +2825,37 @@
           </a:p>
           <a:p>
             <a:r>
-              <a:t>handful of orders a month, and chapter 3 already said what a handful is worth.</a:t>
+              <a:t>handful of orders a month, and chapter 3 already said what a handful is worth. Say the list in full</a:t>
+            </a:r>
+          </a:p>
+          <a:p>
+            <a:r>
+              <a:t>once: the campaign platform's August list of 160 Retail-Plus and Retail-Core customers, under the</a:t>
+            </a:r>
+          </a:p>
+          <a:p>
+            <a:r>
+              <a:t>platform's own customer ids, with one average August spend for each group, recording who received</a:t>
+            </a:r>
+          </a:p>
+          <a:p>
+            <a:r>
+              <a:t>the sale whatever it was aimed at. It cannot be matched to Finance's order file, whose 22</a:t>
+            </a:r>
+          </a:p>
+          <a:p>
+            <a:r>
+              <a:t>Retail-Plus members and discount column carry no record of the sale. So it answers who got the sale</a:t>
+            </a:r>
+          </a:p>
+          <a:p>
+            <a:r>
+              <a:t>and how the groups differ, and it sizes the Diwali hold-back; the retention offer was sized on</a:t>
+            </a:r>
+          </a:p>
+          <a:p>
+            <a:r>
+              <a:t>Finance's file.</a:t>
             </a:r>
           </a:p>
         </p:txBody>
@@ -2900,7 +2995,12 @@
           <a:lstStyle/>
           <a:p>
             <a:r>
-              <a:t>LIVE, 1 minute. Predict, then notebook 6, level 1.</a:t>
+              <a:t>LIVE, 1 minute. Predict, then notebook 6, level 1. The campaigns table is the plan; the platform's</a:t>
+            </a:r>
+          </a:p>
+          <a:p>
+            <a:r>
+              <a:t>list is what was sent, so where they disagree the list is the one to trust for who got the sale.</a:t>
             </a:r>
           </a:p>
         </p:txBody>
@@ -6408,7 +6508,7 @@
                 </a:solidFill>
                 <a:latin typeface="Georgia"/>
               </a:rPr>
-              <a:t>06</a:t>
+              <a:t>01</a:t>
             </a:r>
           </a:p>
         </p:txBody>
@@ -6478,7 +6578,7 @@
                 </a:solidFill>
                 <a:latin typeface="Georgia"/>
               </a:rPr>
-              <a:t>07</a:t>
+              <a:t>02</a:t>
             </a:r>
           </a:p>
         </p:txBody>
@@ -6548,7 +6648,7 @@
                 </a:solidFill>
                 <a:latin typeface="Georgia"/>
               </a:rPr>
-              <a:t>08</a:t>
+              <a:t>03</a:t>
             </a:r>
           </a:p>
         </p:txBody>
@@ -6618,7 +6718,7 @@
                 </a:solidFill>
                 <a:latin typeface="Georgia"/>
               </a:rPr>
-              <a:t>09</a:t>
+              <a:t>04</a:t>
             </a:r>
           </a:p>
         </p:txBody>
@@ -6688,7 +6788,7 @@
                 </a:solidFill>
                 <a:latin typeface="Georgia"/>
               </a:rPr>
-              <a:t>10</a:t>
+              <a:t>05</a:t>
             </a:r>
           </a:p>
         </p:txBody>
@@ -6758,7 +6858,7 @@
                 </a:solidFill>
                 <a:latin typeface="Georgia"/>
               </a:rPr>
-              <a:t>11</a:t>
+              <a:t>06</a:t>
             </a:r>
           </a:p>
         </p:txBody>
@@ -7740,7 +7840,7 @@
                 </a:solidFill>
                 <a:latin typeface="Calibri"/>
               </a:rPr>
-              <a:t>Retail-Core, the segment the sale was not aimed at (though the extract shows it reached some Retail-Core customers), rose 73 percent from July to August. Retail-Plus fell 58 percent from May to June with no sale running. July's Retail-Plus figure stands on 4 delivered orders.</a:t>
+              <a:t>Retail-Core, the segment the sale was not aimed at (though the platform's list shows it reached some Retail-Core customers), rose 73 percent from July to August. Retail-Plus fell 58 percent from May to June with no sale running. July's Retail-Plus figure stands on 4 delivered orders.</a:t>
             </a:r>
           </a:p>
         </p:txBody>
@@ -8490,7 +8590,7 @@
                 </a:solidFill>
                 <a:latin typeface="Calibri"/>
               </a:rPr>
-              <a:t>Compare like with like in time: August's share of each segment's quarter, and how often chance makes it.</a:t>
+              <a:t>Compare like with like in time: August's share of each segment's quarter, both directions counted.</a:t>
             </a:r>
           </a:p>
         </p:txBody>
@@ -8858,7 +8958,7 @@
                 </a:solidFill>
                 <a:latin typeface="Calibri"/>
               </a:rPr>
-              <a:t>CHANCE</a:t>
+              <a:t>EITHER WAY</a:t>
             </a:r>
           </a:p>
         </p:txBody>
@@ -8872,7 +8972,7 @@
         <p:spPr>
           <a:xfrm>
             <a:off x="8133892" y="2893060"/>
-            <a:ext cx="3527450" cy="193421"/>
+            <a:ext cx="3527450" cy="350266"/>
           </a:xfrm>
           <a:prstGeom prst="rect">
             <a:avLst/>
@@ -8893,7 +8993,7 @@
                 </a:solidFill>
                 <a:latin typeface="Calibri"/>
               </a:rPr>
-              <a:t>label shuffles that make a 4-point gap either way</a:t>
+              <a:t>label shuffles making a 4-point gap; 4 in 10 in Marketing's direction</a:t>
             </a:r>
           </a:p>
         </p:txBody>
@@ -8951,7 +9051,7 @@
         <p:spPr>
           <a:xfrm>
             <a:off x="530352" y="3419856"/>
-            <a:ext cx="11130991" cy="772160"/>
+            <a:ext cx="11130991" cy="1048512"/>
           </a:xfrm>
           <a:prstGeom prst="rect">
             <a:avLst/>
@@ -8976,7 +9076,7 @@
                 </a:solidFill>
                 <a:latin typeface="Calibri"/>
               </a:rPr>
-              <a:t>The 170 percent becomes an August four points busier than the untargeted segment's, a gap chance makes most of the time. The months show no sign of the sale beyond a busy August for everyone.</a:t>
+              <a:t>The 170 percent becomes an August four points busier than the untargeted segment's, a gap chance makes about eight times in ten either way, and four in ten in the direction Marketing's claim points. The months show no sign of the sale beyond a busy August for everyone.</a:t>
             </a:r>
           </a:p>
         </p:txBody>
@@ -9726,14 +9826,14 @@
                 </a:solidFill>
                 <a:latin typeface="Calibri"/>
               </a:rPr>
-              <a:t>Decide before the sale, inside each segment, with a coin, and agree the measure in advance.</a:t>
+              <a:t>Decide before the sale, inside each segment of the platform's list, with a coin, the measure agreed.</a:t>
             </a:r>
           </a:p>
         </p:txBody>
       </p:sp>
       <p:pic>
         <p:nvPicPr>
-          <p:cNvPr id="9" name="mermaid diagram" descr="6f8f5956c994e8e8.png"/>
+          <p:cNvPr id="9" name="mermaid diagram" descr="6886a0800f03a063.png"/>
           <p:cNvPicPr>
             <a:picLocks noChangeAspect="1"/>
           </p:cNvPicPr>
@@ -9747,8 +9847,8 @@
         </p:blipFill>
         <p:spPr>
           <a:xfrm>
-            <a:off x="530352" y="1956816"/>
-            <a:ext cx="11130991" cy="2092677"/>
+            <a:off x="1338110" y="1956816"/>
+            <a:ext cx="9515475" cy="1385887"/>
           </a:xfrm>
           <a:prstGeom prst="rect">
             <a:avLst/>
@@ -9763,7 +9863,7 @@
         </p:nvSpPr>
         <p:spPr>
           <a:xfrm>
-            <a:off x="530352" y="4195797"/>
+            <a:off x="530352" y="3489007"/>
             <a:ext cx="11130991" cy="1074420"/>
           </a:xfrm>
           <a:prstGeom prst="roundRect">
@@ -9811,7 +9911,7 @@
         </p:nvSpPr>
         <p:spPr>
           <a:xfrm>
-            <a:off x="676656" y="4323813"/>
+            <a:off x="676656" y="3617023"/>
             <a:ext cx="45720" cy="818388"/>
           </a:xfrm>
           <a:prstGeom prst="roundRect">
@@ -9857,7 +9957,7 @@
         </p:nvSpPr>
         <p:spPr>
           <a:xfrm>
-            <a:off x="877824" y="4314669"/>
+            <a:off x="877824" y="3607879"/>
             <a:ext cx="10564063" cy="891540"/>
           </a:xfrm>
           <a:prstGeom prst="rect">
@@ -9887,7 +9987,7 @@
                 </a:solidFill>
                 <a:latin typeface="Calibri"/>
               </a:rPr>
-              <a:t>Holding back 14 of 70 Retail-Plus customers at Marketing's own 6 percent lift forgoes about Rs 4,200, and nothing if the lift is not real. Fourteen are too few to see a 6 percent lift; sizing the hold-back is a question of power, which comes later.</a:t>
+              <a:t>Holding back 14 of the platform's 70 Retail-Plus customers at Marketing's own 6 percent lift forgoes about Rs 4,200, and nothing if the lift is not real. The retention test was sized on Finance's 22 members; each decision is sized on the list it acts on.</a:t>
             </a:r>
           </a:p>
         </p:txBody>
@@ -10602,7 +10702,7 @@
                 </a:solidFill>
                 <a:latin typeface="Georgia"/>
               </a:rPr>
-              <a:t>A second route: chapter 4's split agrees</a:t>
+              <a:t>A second route: the same test, no sale</a:t>
             </a:r>
           </a:p>
         </p:txBody>
@@ -10637,305 +10737,100 @@
                 </a:solidFill>
                 <a:latin typeface="Calibri"/>
               </a:rPr>
-              <a:t>A different table and a different idea reach the same verdict, with an honest difference.</a:t>
-            </a:r>
-          </a:p>
-        </p:txBody>
-      </p:sp>
-      <p:graphicFrame>
-        <p:nvGraphicFramePr>
-          <p:cNvPr id="9" name="Table 8"/>
-          <p:cNvGraphicFramePr>
-            <a:graphicFrameLocks noGrp="1"/>
-          </p:cNvGraphicFramePr>
-          <p:nvPr/>
-        </p:nvGraphicFramePr>
-        <p:xfrm>
-          <a:off x="530352" y="1956816"/>
-          <a:ext cx="11130991" cy="1593088"/>
-        </p:xfrm>
-        <a:graphic>
-          <a:graphicData uri="http://schemas.openxmlformats.org/drawingml/2006/table">
-            <a:tbl>
-              <a:tblPr firstRow="0" bandRow="0">
-                <a:tableStyleId>{2D5ABB26-0587-4C30-8999-92F81FD0307C}</a:tableStyleId>
-              </a:tblPr>
-              <a:tblGrid>
-                <a:gridCol w="2350551"/>
-                <a:gridCol w="4390220"/>
-                <a:gridCol w="4390220"/>
-              </a:tblGrid>
-              <a:tr h="369824">
-                <a:tc>
-                  <a:txBody>
-                    <a:bodyPr/>
-                    <a:lstStyle/>
-                    <a:p>
-                      <a:r>
-                        <a:rPr sz="1450" b="1" i="0">
-                          <a:solidFill>
-                            <a:srgbClr val="FFFFFF"/>
-                          </a:solidFill>
-                          <a:latin typeface="Calibri"/>
-                        </a:rPr>
-                        <a:t>Route</a:t>
-                      </a:r>
-                    </a:p>
-                  </a:txBody>
-                  <a:tcPr marL="101600" marR="101600" marT="38100" marB="38100" anchor="ctr">
-                    <a:solidFill>
-                      <a:srgbClr val="1A0F5C"/>
-                    </a:solidFill>
-                  </a:tcPr>
-                </a:tc>
-                <a:tc>
-                  <a:txBody>
-                    <a:bodyPr/>
-                    <a:lstStyle/>
-                    <a:p>
-                      <a:r>
-                        <a:rPr sz="1450" b="1" i="0">
-                          <a:solidFill>
-                            <a:srgbClr val="FFFFFF"/>
-                          </a:solidFill>
-                          <a:latin typeface="Calibri"/>
-                        </a:rPr>
-                        <a:t>What it finds</a:t>
-                      </a:r>
-                    </a:p>
-                  </a:txBody>
-                  <a:tcPr marL="101600" marR="101600" marT="38100" marB="38100" anchor="ctr">
-                    <a:solidFill>
-                      <a:srgbClr val="1A0F5C"/>
-                    </a:solidFill>
-                  </a:tcPr>
-                </a:tc>
-                <a:tc>
-                  <a:txBody>
-                    <a:bodyPr/>
-                    <a:lstStyle/>
-                    <a:p>
-                      <a:r>
-                        <a:rPr sz="1450" b="1" i="0">
-                          <a:solidFill>
-                            <a:srgbClr val="FFFFFF"/>
-                          </a:solidFill>
-                          <a:latin typeface="Calibri"/>
-                        </a:rPr>
-                        <a:t>What it says</a:t>
-                      </a:r>
-                    </a:p>
-                  </a:txBody>
-                  <a:tcPr marL="101600" marR="101600" marT="38100" marB="38100" anchor="ctr">
-                    <a:solidFill>
-                      <a:srgbClr val="1A0F5C"/>
-                    </a:solidFill>
-                  </a:tcPr>
-                </a:tc>
-              </a:tr>
-              <a:tr h="611632">
-                <a:tc>
-                  <a:txBody>
-                    <a:bodyPr/>
-                    <a:lstStyle/>
-                    <a:p>
-                      <a:r>
-                        <a:rPr sz="1400" b="0" i="0">
-                          <a:solidFill>
-                            <a:srgbClr val="1A1440"/>
-                          </a:solidFill>
-                          <a:latin typeface="Calibri"/>
-                        </a:rPr>
-                        <a:t>The months, beside Retail-Core</a:t>
-                      </a:r>
-                    </a:p>
-                  </a:txBody>
-                  <a:tcPr marL="101600" marR="101600" marT="38100" marB="38100" anchor="ctr">
-                    <a:solidFill>
-                      <a:srgbClr val="FFFFFF"/>
-                    </a:solidFill>
-                  </a:tcPr>
-                </a:tc>
-                <a:tc>
-                  <a:txBody>
-                    <a:bodyPr/>
-                    <a:lstStyle/>
-                    <a:p>
-                      <a:r>
-                        <a:rPr sz="1400" b="0" i="0">
-                          <a:solidFill>
-                            <a:srgbClr val="1A1440"/>
-                          </a:solidFill>
-                          <a:latin typeface="Calibri"/>
-                        </a:rPr>
-                        <a:t>August's share 4 points higher, which the label shuffle makes about 8 times in 10</a:t>
-                      </a:r>
-                    </a:p>
-                  </a:txBody>
-                  <a:tcPr marL="101600" marR="101600" marT="38100" marB="38100" anchor="ctr">
-                    <a:solidFill>
-                      <a:srgbClr val="FFFFFF"/>
-                    </a:solidFill>
-                  </a:tcPr>
-                </a:tc>
-                <a:tc>
-                  <a:txBody>
-                    <a:bodyPr/>
-                    <a:lstStyle/>
-                    <a:p>
-                      <a:r>
-                        <a:rPr sz="1400" b="0" i="0">
-                          <a:solidFill>
-                            <a:srgbClr val="1A1440"/>
-                          </a:solidFill>
-                          <a:latin typeface="Calibri"/>
-                        </a:rPr>
-                        <a:t>No sign; Retail-Core was partly reached, so it is an imperfect comparison</a:t>
-                      </a:r>
-                    </a:p>
-                  </a:txBody>
-                  <a:tcPr marL="101600" marR="101600" marT="38100" marB="38100" anchor="ctr">
-                    <a:solidFill>
-                      <a:srgbClr val="FFFFFF"/>
-                    </a:solidFill>
-                  </a:tcPr>
-                </a:tc>
-              </a:tr>
-              <a:tr h="611632">
-                <a:tc>
-                  <a:txBody>
-                    <a:bodyPr/>
-                    <a:lstStyle/>
-                    <a:p>
-                      <a:r>
-                        <a:rPr sz="1400" b="0" i="0">
-                          <a:solidFill>
-                            <a:srgbClr val="1A1440"/>
-                          </a:solidFill>
-                          <a:latin typeface="Calibri"/>
-                        </a:rPr>
-                        <a:t>Inside each segment, chapter 4</a:t>
-                      </a:r>
-                    </a:p>
-                  </a:txBody>
-                  <a:tcPr marL="101600" marR="101600" marT="38100" marB="38100" anchor="ctr">
-                    <a:solidFill>
-                      <a:srgbClr val="F4F2FA"/>
-                    </a:solidFill>
-                  </a:tcPr>
-                </a:tc>
-                <a:tc>
-                  <a:txBody>
-                    <a:bodyPr/>
-                    <a:lstStyle/>
-                    <a:p>
-                      <a:r>
-                        <a:rPr sz="1400" b="0" i="0">
-                          <a:solidFill>
-                            <a:srgbClr val="1A1440"/>
-                          </a:solidFill>
-                          <a:latin typeface="Calibri"/>
-                        </a:rPr>
-                        <a:t>Got it spent 3.0 percent less, in both segments</a:t>
-                      </a:r>
-                    </a:p>
-                  </a:txBody>
-                  <a:tcPr marL="101600" marR="101600" marT="38100" marB="38100" anchor="ctr">
-                    <a:solidFill>
-                      <a:srgbClr val="F4F2FA"/>
-                    </a:solidFill>
-                  </a:tcPr>
-                </a:tc>
-                <a:tc>
-                  <a:txBody>
-                    <a:bodyPr/>
-                    <a:lstStyle/>
-                    <a:p>
-                      <a:r>
-                        <a:rPr sz="1400" b="0" i="0">
-                          <a:solidFill>
-                            <a:srgbClr val="1A1440"/>
-                          </a:solidFill>
-                          <a:latin typeface="Calibri"/>
-                        </a:rPr>
-                        <a:t>No lift, and possibly a loss</a:t>
-                      </a:r>
-                    </a:p>
-                  </a:txBody>
-                  <a:tcPr marL="101600" marR="101600" marT="38100" marB="38100" anchor="ctr">
-                    <a:solidFill>
-                      <a:srgbClr val="F4F2FA"/>
-                    </a:solidFill>
-                  </a:tcPr>
-                </a:tc>
-              </a:tr>
-            </a:tbl>
-          </a:graphicData>
-        </a:graphic>
-      </p:graphicFrame>
-      <p:sp>
-        <p:nvSpPr>
-          <p:cNvPr id="10" name="Rounded Rectangle 9"/>
+              <a:t>Run August's test on the three months of Q1, when no sale ran, and see what an ordinary month does.</a:t>
+            </a:r>
+          </a:p>
+        </p:txBody>
+      </p:sp>
+      <p:pic>
+        <p:nvPicPr>
+          <p:cNvPr id="9" name="mermaid diagram" descr="c12626987da01f3b.png"/>
+          <p:cNvPicPr>
+            <a:picLocks noChangeAspect="1"/>
+          </p:cNvPicPr>
+          <p:nvPr/>
+        </p:nvPicPr>
+        <p:blipFill>
+          <a:blip r:embed="rId5"/>
+          <a:stretch>
+            <a:fillRect/>
+          </a:stretch>
+        </p:blipFill>
+        <p:spPr>
+          <a:xfrm>
+            <a:off x="2563215" y="1664208"/>
+            <a:ext cx="7065264" cy="3532632"/>
+          </a:xfrm>
+          <a:prstGeom prst="rect">
+            <a:avLst/>
+          </a:prstGeom>
+        </p:spPr>
+      </p:pic>
+      <p:sp>
+        <p:nvSpPr>
+          <p:cNvPr id="10" name="TextBox 9"/>
+          <p:cNvSpPr txBox="1"/>
+          <p:nvPr/>
+        </p:nvSpPr>
+        <p:spPr>
+          <a:xfrm>
+            <a:off x="530352" y="5242560"/>
+            <a:ext cx="11130991" cy="957072"/>
+          </a:xfrm>
+          <a:prstGeom prst="rect">
+            <a:avLst/>
+          </a:prstGeom>
+          <a:noFill/>
+        </p:spPr>
+        <p:txBody>
+          <a:bodyPr wrap="square" anchor="t" lIns="0" rIns="0" tIns="0" bIns="0">
+            <a:spAutoFit/>
+          </a:bodyPr>
+          <a:lstStyle/>
+          <a:p>
+            <a:r>
+              <a:rPr sz="1600" b="0" i="0">
+                <a:solidFill>
+                  <a:srgbClr val="1A1440"/>
+                </a:solidFill>
+                <a:latin typeface="Calibri"/>
+              </a:rPr>
+              <a:t>Months with no sale make gaps as large as August's and far larger, so August's four points carry no sign of the sale. </a:t>
+            </a:r>
+            <a:r>
+              <a:rPr sz="1600" b="1" i="0">
+                <a:solidFill>
+                  <a:srgbClr val="1A1440"/>
+                </a:solidFill>
+                <a:latin typeface="Calibri"/>
+              </a:rPr>
+              <a:t>When to switch.</a:t>
+            </a:r>
+            <a:r>
+              <a:rPr sz="1600" b="0" i="0">
+                <a:solidFill>
+                  <a:srgbClr val="1A1440"/>
+                </a:solidFill>
+                <a:latin typeface="Calibri"/>
+              </a:rPr>
+              <a:t> The months when no exposure list exists; the split when one does; the hold-back whenever the next campaign can still be designed.</a:t>
+            </a:r>
+          </a:p>
+        </p:txBody>
+      </p:sp>
+      <p:sp>
+        <p:nvSpPr>
+          <p:cNvPr id="11" name="Oval 10"/>
           <p:cNvSpPr/>
           <p:nvPr/>
         </p:nvSpPr>
         <p:spPr>
           <a:xfrm>
-            <a:off x="530352" y="3805936"/>
-            <a:ext cx="11130991" cy="807720"/>
-          </a:xfrm>
-          <a:prstGeom prst="roundRect">
-            <a:avLst>
-              <a:gd name="adj" fmla="val 8000"/>
-            </a:avLst>
-          </a:prstGeom>
-          <a:solidFill>
-            <a:srgbClr val="F7F5FD"/>
-          </a:solidFill>
-          <a:ln w="9525">
-            <a:solidFill>
-              <a:srgbClr val="E4E1F1"/>
-            </a:solidFill>
-          </a:ln>
-          <a:effectLst/>
-        </p:spPr>
-        <p:style>
-          <a:lnRef idx="1">
-            <a:schemeClr val="accent1"/>
-          </a:lnRef>
-          <a:fillRef idx="3">
-            <a:schemeClr val="accent1"/>
-          </a:fillRef>
-          <a:effectRef idx="2">
-            <a:schemeClr val="accent1"/>
-          </a:effectRef>
-          <a:fontRef idx="minor">
-            <a:schemeClr val="lt1"/>
-          </a:fontRef>
-        </p:style>
-        <p:txBody>
-          <a:bodyPr rtlCol="0" anchor="ctr" wrap="square"/>
-          <a:lstStyle/>
-          <a:p>
-            <a:pPr algn="ctr"/>
-          </a:p>
-        </p:txBody>
-      </p:sp>
-      <p:sp>
-        <p:nvSpPr>
-          <p:cNvPr id="11" name="Rounded Rectangle 10"/>
-          <p:cNvSpPr/>
-          <p:nvPr/>
-        </p:nvSpPr>
-        <p:spPr>
-          <a:xfrm>
-            <a:off x="676656" y="3933951"/>
-            <a:ext cx="45720" cy="551688"/>
-          </a:xfrm>
-          <a:prstGeom prst="roundRect">
-            <a:avLst>
-              <a:gd name="adj" fmla="val 50000"/>
-            </a:avLst>
+            <a:off x="530352" y="6492240"/>
+            <a:ext cx="64008" cy="64008"/>
+          </a:xfrm>
+          <a:prstGeom prst="ellipse">
+            <a:avLst/>
           </a:prstGeom>
           <a:solidFill>
             <a:srgbClr val="5B3FD6"/>
@@ -10975,93 +10870,6 @@
         </p:nvSpPr>
         <p:spPr>
           <a:xfrm>
-            <a:off x="877824" y="3924807"/>
-            <a:ext cx="10564063" cy="624840"/>
-          </a:xfrm>
-          <a:prstGeom prst="rect">
-            <a:avLst/>
-          </a:prstGeom>
-          <a:noFill/>
-        </p:spPr>
-        <p:txBody>
-          <a:bodyPr wrap="square" anchor="ctr" lIns="0" rIns="0" tIns="0" bIns="0">
-            <a:spAutoFit/>
-          </a:bodyPr>
-          <a:lstStyle/>
-          <a:p>
-            <a:r>
-              <a:rPr sz="1500" b="1">
-                <a:solidFill>
-                  <a:srgbClr val="5B3FD6"/>
-                </a:solidFill>
-                <a:latin typeface="Calibri"/>
-              </a:rPr>
-              <a:t>When to switch. </a:t>
-            </a:r>
-            <a:r>
-              <a:rPr sz="1500" b="0" i="0">
-                <a:solidFill>
-                  <a:srgbClr val="1A1440"/>
-                </a:solidFill>
-                <a:latin typeface="Calibri"/>
-              </a:rPr>
-              <a:t>The months when no exposure table exists; the split when one does; the hold-back whenever the next campaign can still be designed.</a:t>
-            </a:r>
-          </a:p>
-        </p:txBody>
-      </p:sp>
-      <p:sp>
-        <p:nvSpPr>
-          <p:cNvPr id="13" name="Oval 12"/>
-          <p:cNvSpPr/>
-          <p:nvPr/>
-        </p:nvSpPr>
-        <p:spPr>
-          <a:xfrm>
-            <a:off x="530352" y="6492240"/>
-            <a:ext cx="64008" cy="64008"/>
-          </a:xfrm>
-          <a:prstGeom prst="ellipse">
-            <a:avLst/>
-          </a:prstGeom>
-          <a:solidFill>
-            <a:srgbClr val="5B3FD6"/>
-          </a:solidFill>
-          <a:ln>
-            <a:noFill/>
-          </a:ln>
-          <a:effectLst/>
-        </p:spPr>
-        <p:style>
-          <a:lnRef idx="1">
-            <a:schemeClr val="accent1"/>
-          </a:lnRef>
-          <a:fillRef idx="3">
-            <a:schemeClr val="accent1"/>
-          </a:fillRef>
-          <a:effectRef idx="2">
-            <a:schemeClr val="accent1"/>
-          </a:effectRef>
-          <a:fontRef idx="minor">
-            <a:schemeClr val="lt1"/>
-          </a:fontRef>
-        </p:style>
-        <p:txBody>
-          <a:bodyPr rtlCol="0" anchor="ctr" wrap="square"/>
-          <a:lstStyle/>
-          <a:p>
-            <a:pPr algn="ctr"/>
-          </a:p>
-        </p:txBody>
-      </p:sp>
-      <p:sp>
-        <p:nvSpPr>
-          <p:cNvPr id="14" name="TextBox 13"/>
-          <p:cNvSpPr txBox="1"/>
-          <p:nvPr/>
-        </p:nvSpPr>
-        <p:spPr>
-          <a:xfrm>
             <a:off x="640080" y="6437376"/>
             <a:ext cx="1148429" cy="152146"/>
           </a:xfrm>
@@ -11091,7 +10899,7 @@
       </p:sp>
       <p:sp>
         <p:nvSpPr>
-          <p:cNvPr id="15" name="Oval 14"/>
+          <p:cNvPr id="13" name="Oval 12"/>
           <p:cNvSpPr/>
           <p:nvPr/>
         </p:nvSpPr>
@@ -11135,7 +10943,7 @@
       </p:sp>
       <p:sp>
         <p:nvSpPr>
-          <p:cNvPr id="16" name="TextBox 15"/>
+          <p:cNvPr id="14" name="TextBox 13"/>
           <p:cNvSpPr txBox="1"/>
           <p:nvPr/>
         </p:nvSpPr>
@@ -11170,7 +10978,7 @@
       </p:sp>
       <p:sp>
         <p:nvSpPr>
-          <p:cNvPr id="17" name="Oval 16"/>
+          <p:cNvPr id="15" name="Oval 14"/>
           <p:cNvSpPr/>
           <p:nvPr/>
         </p:nvSpPr>
@@ -11214,7 +11022,7 @@
       </p:sp>
       <p:sp>
         <p:nvSpPr>
-          <p:cNvPr id="18" name="TextBox 17"/>
+          <p:cNvPr id="16" name="TextBox 15"/>
           <p:cNvSpPr txBox="1"/>
           <p:nvPr/>
         </p:nvSpPr>
@@ -11249,7 +11057,7 @@
       </p:sp>
       <p:sp>
         <p:nvSpPr>
-          <p:cNvPr id="19" name="Oval 18"/>
+          <p:cNvPr id="17" name="Oval 16"/>
           <p:cNvSpPr/>
           <p:nvPr/>
         </p:nvSpPr>
@@ -11293,7 +11101,7 @@
       </p:sp>
       <p:sp>
         <p:nvSpPr>
-          <p:cNvPr id="20" name="TextBox 19"/>
+          <p:cNvPr id="18" name="TextBox 17"/>
           <p:cNvSpPr txBox="1"/>
           <p:nvPr/>
         </p:nvSpPr>
@@ -11328,7 +11136,7 @@
       </p:sp>
       <p:sp>
         <p:nvSpPr>
-          <p:cNvPr id="21" name="Oval 20"/>
+          <p:cNvPr id="19" name="Oval 18"/>
           <p:cNvSpPr/>
           <p:nvPr/>
         </p:nvSpPr>
@@ -11372,7 +11180,7 @@
       </p:sp>
       <p:sp>
         <p:nvSpPr>
-          <p:cNvPr id="22" name="TextBox 21"/>
+          <p:cNvPr id="20" name="TextBox 19"/>
           <p:cNvSpPr txBox="1"/>
           <p:nvPr/>
         </p:nvSpPr>
@@ -11407,7 +11215,7 @@
       </p:sp>
       <p:sp>
         <p:nvSpPr>
-          <p:cNvPr id="23" name="Oval 22"/>
+          <p:cNvPr id="21" name="Oval 20"/>
           <p:cNvSpPr/>
           <p:nvPr/>
         </p:nvSpPr>
@@ -11451,7 +11259,7 @@
       </p:sp>
       <p:sp>
         <p:nvSpPr>
-          <p:cNvPr id="24" name="TextBox 23"/>
+          <p:cNvPr id="22" name="TextBox 21"/>
           <p:cNvSpPr txBox="1"/>
           <p:nvPr/>
         </p:nvSpPr>
@@ -11486,7 +11294,7 @@
       </p:sp>
       <p:sp>
         <p:nvSpPr>
-          <p:cNvPr id="25" name="TextBox 24"/>
+          <p:cNvPr id="23" name="TextBox 22"/>
           <p:cNvSpPr txBox="1"/>
           <p:nvPr/>
         </p:nvSpPr>
@@ -11755,14 +11563,14 @@
                 </a:solidFill>
                 <a:latin typeface="Calibri"/>
               </a:rPr>
-              <a:t>A senior offers the test as a way forward, never as a verdict on Marketing's work.</a:t>
+              <a:t>A senior offers the test as a way forward, and keeps any verdict on Marketing's work out of it.</a:t>
             </a:r>
           </a:p>
         </p:txBody>
       </p:sp>
       <p:pic>
         <p:nvPicPr>
-          <p:cNvPr id="9" name="mermaid diagram" descr="111d5a52647ef440.png"/>
+          <p:cNvPr id="9" name="mermaid diagram" descr="bbafd4674bb1db39.png"/>
           <p:cNvPicPr>
             <a:picLocks noChangeAspect="1"/>
           </p:cNvPicPr>
@@ -11776,8 +11584,8 @@
         </p:blipFill>
         <p:spPr>
           <a:xfrm>
-            <a:off x="780897" y="1863852"/>
-            <a:ext cx="10629900" cy="1600200"/>
+            <a:off x="902341" y="1956816"/>
+            <a:ext cx="10387012" cy="871537"/>
           </a:xfrm>
           <a:prstGeom prst="rect">
             <a:avLst/>
@@ -11792,8 +11600,8 @@
         </p:nvSpPr>
         <p:spPr>
           <a:xfrm>
-            <a:off x="530352" y="3610356"/>
-            <a:ext cx="11130991" cy="1121664"/>
+            <a:off x="530352" y="2974657"/>
+            <a:ext cx="11130991" cy="1380744"/>
           </a:xfrm>
           <a:prstGeom prst="roundRect">
             <a:avLst>
@@ -11846,7 +11654,7 @@
         </p:nvSpPr>
         <p:spPr>
           <a:xfrm>
-            <a:off x="758952" y="3942588"/>
+            <a:off x="758952" y="3436429"/>
             <a:ext cx="457200" cy="457200"/>
           </a:xfrm>
           <a:prstGeom prst="ellipse">
@@ -11898,7 +11706,7 @@
         </p:blipFill>
         <p:spPr>
           <a:xfrm>
-            <a:off x="868680" y="4052316"/>
+            <a:off x="868680" y="3546157"/>
             <a:ext cx="237744" cy="237744"/>
           </a:xfrm>
           <a:prstGeom prst="rect">
@@ -11914,7 +11722,7 @@
         </p:nvSpPr>
         <p:spPr>
           <a:xfrm>
-            <a:off x="1399031" y="3756660"/>
+            <a:off x="1399031" y="3120961"/>
             <a:ext cx="9987991" cy="160401"/>
           </a:xfrm>
           <a:prstGeom prst="rect">
@@ -11949,8 +11757,8 @@
         </p:nvSpPr>
         <p:spPr>
           <a:xfrm>
-            <a:off x="1399031" y="3976116"/>
-            <a:ext cx="9987991" cy="682752"/>
+            <a:off x="1399031" y="3340417"/>
+            <a:ext cx="9987991" cy="941832"/>
           </a:xfrm>
           <a:prstGeom prst="rect">
             <a:avLst/>
@@ -11970,7 +11778,7 @@
                 </a:solidFill>
                 <a:latin typeface="Calibri"/>
               </a:rPr>
-              <a:t>Two routes find no lift, and you priced the hold-back and said what it cannot yet size. Take that to Marketing as an offer, never as a verdict on their work.</a:t>
+              <a:t>Two routes find no lift, and a quarter with no sale swings further than August. You priced the hold-back at about Rs 4,200 on the list it acts on and said what it cannot yet size. Take that to Marketing as an offer.</a:t>
             </a:r>
           </a:p>
         </p:txBody>
@@ -11983,7 +11791,7 @@
         </p:nvSpPr>
         <p:spPr>
           <a:xfrm>
-            <a:off x="530352" y="4896612"/>
+            <a:off x="530352" y="4519993"/>
             <a:ext cx="11130991" cy="1121664"/>
           </a:xfrm>
           <a:prstGeom prst="roundRect">
@@ -12037,7 +11845,7 @@
         </p:nvSpPr>
         <p:spPr>
           <a:xfrm>
-            <a:off x="758952" y="5228844"/>
+            <a:off x="758952" y="4852225"/>
             <a:ext cx="457200" cy="457200"/>
           </a:xfrm>
           <a:prstGeom prst="ellipse">
@@ -12089,7 +11897,7 @@
         </p:blipFill>
         <p:spPr>
           <a:xfrm>
-            <a:off x="868680" y="5338572"/>
+            <a:off x="868680" y="4961953"/>
             <a:ext cx="237744" cy="237744"/>
           </a:xfrm>
           <a:prstGeom prst="rect">
@@ -12105,7 +11913,7 @@
         </p:nvSpPr>
         <p:spPr>
           <a:xfrm>
-            <a:off x="1399031" y="5042916"/>
+            <a:off x="1399031" y="4666297"/>
             <a:ext cx="9987991" cy="160401"/>
           </a:xfrm>
           <a:prstGeom prst="rect">
@@ -12140,7 +11948,7 @@
         </p:nvSpPr>
         <p:spPr>
           <a:xfrm>
-            <a:off x="1399031" y="5262372"/>
+            <a:off x="1399031" y="4885753"/>
             <a:ext cx="9987991" cy="682752"/>
           </a:xfrm>
           <a:prstGeom prst="rect">
@@ -13311,7 +13119,7 @@
                 </a:solidFill>
                 <a:latin typeface="Calibri"/>
               </a:rPr>
-              <a:t>Week 1 Day 4: did the discount work</a:t>
+              <a:t>Week 1, Day 4. Did the discount work?</a:t>
             </a:r>
           </a:p>
         </p:txBody>
@@ -13834,7 +13642,7 @@
                 </a:solidFill>
                 <a:latin typeface="Calibri"/>
               </a:rPr>
-              <a:t>Retail-Plus, 5,000 shuffles, seed 2026, and the p-value sentence.</a:t>
+              <a:t>Retail-Plus, 5,000 flips, seed 2026, counted both ways.</a:t>
             </a:r>
           </a:p>
         </p:txBody>
@@ -14016,7 +13824,7 @@
         <p:spPr>
           <a:xfrm>
             <a:off x="2957718" y="3277870"/>
-            <a:ext cx="1750710" cy="366776"/>
+            <a:ext cx="1750710" cy="531876"/>
           </a:xfrm>
           <a:prstGeom prst="rect">
             <a:avLst/>
@@ -14037,7 +13845,7 @@
                 </a:solidFill>
                 <a:latin typeface="Calibri"/>
               </a:rPr>
-              <a:t>The fall in rupees against the company's quarter.</a:t>
+              <a:t>The fall against the company's quarter, and a coin-chosen half-tier test.</a:t>
             </a:r>
           </a:p>
         </p:txBody>
@@ -14443,7 +14251,7 @@
                 </a:solidFill>
                 <a:latin typeface="Calibri"/>
               </a:rPr>
-              <a:t>Did the monsoon sale lift revenue, and for whom?</a:t>
+              <a:t>Did the monsoon sale lift spend, and for whom?</a:t>
             </a:r>
           </a:p>
         </p:txBody>
@@ -14617,7 +14425,7 @@
                 </a:solidFill>
                 <a:latin typeface="Calibri"/>
               </a:rPr>
-              <a:t>The note</a:t>
+              <a:t>Diwali and the note</a:t>
             </a:r>
           </a:p>
         </p:txBody>
@@ -14652,7 +14460,7 @@
                 </a:solidFill>
                 <a:latin typeface="Calibri"/>
               </a:rPr>
-              <a:t>Claim, evidence, caveat, action for all three questions, under 200 words.</a:t>
+              <a:t>The hold-back sized on the platform's list, then the note under 200 words.</a:t>
             </a:r>
           </a:p>
         </p:txBody>
@@ -15409,7 +15217,7 @@
       </p:sp>
       <p:pic>
         <p:nvPicPr>
-          <p:cNvPr id="9" name="mermaid diagram" descr="4630802095584633.png"/>
+          <p:cNvPr id="9" name="mermaid diagram" descr="c34c22d29c5ca9aa.png"/>
           <p:cNvPicPr>
             <a:picLocks noChangeAspect="1"/>
           </p:cNvPicPr>
@@ -15423,8 +15231,8 @@
         </p:blipFill>
         <p:spPr>
           <a:xfrm>
-            <a:off x="2152497" y="1956816"/>
-            <a:ext cx="7886700" cy="1857375"/>
+            <a:off x="2366810" y="1956816"/>
+            <a:ext cx="7458075" cy="1128712"/>
           </a:xfrm>
           <a:prstGeom prst="rect">
             <a:avLst/>
@@ -15439,7 +15247,7 @@
         </p:nvSpPr>
         <p:spPr>
           <a:xfrm>
-            <a:off x="530352" y="3960495"/>
+            <a:off x="530352" y="3231832"/>
             <a:ext cx="11130991" cy="862584"/>
           </a:xfrm>
           <a:prstGeom prst="roundRect">
@@ -15493,7 +15301,7 @@
         </p:nvSpPr>
         <p:spPr>
           <a:xfrm>
-            <a:off x="758952" y="4163187"/>
+            <a:off x="758952" y="3434524"/>
             <a:ext cx="457200" cy="457200"/>
           </a:xfrm>
           <a:prstGeom prst="ellipse">
@@ -15545,7 +15353,7 @@
         </p:blipFill>
         <p:spPr>
           <a:xfrm>
-            <a:off x="868680" y="4272915"/>
+            <a:off x="868680" y="3544252"/>
             <a:ext cx="237744" cy="237744"/>
           </a:xfrm>
           <a:prstGeom prst="rect">
@@ -15561,7 +15369,7 @@
         </p:nvSpPr>
         <p:spPr>
           <a:xfrm>
-            <a:off x="1399031" y="4106799"/>
+            <a:off x="1399031" y="3378136"/>
             <a:ext cx="9987991" cy="160401"/>
           </a:xfrm>
           <a:prstGeom prst="rect">
@@ -15596,7 +15404,7 @@
         </p:nvSpPr>
         <p:spPr>
           <a:xfrm>
-            <a:off x="1399031" y="4326255"/>
+            <a:off x="1399031" y="3597592"/>
             <a:ext cx="9987991" cy="423672"/>
           </a:xfrm>
           <a:prstGeom prst="rect">
@@ -16767,7 +16575,7 @@
                 </a:solidFill>
                 <a:latin typeface="Calibri"/>
               </a:rPr>
-              <a:t>Week 1 Day 4: did the discount work</a:t>
+              <a:t>Week 1, Day 4. Did the discount work?</a:t>
             </a:r>
           </a:p>
         </p:txBody>
@@ -17196,7 +17004,7 @@
                           </a:solidFill>
                           <a:latin typeface="Calibri"/>
                         </a:rPr>
-                        <a:t>"A fall this large turns up in about 3 of every 100 shuffles."</a:t>
+                        <a:t>"A fall this large turns up in about 3 of every 100 flips, 6 either way."</a:t>
                       </a:r>
                     </a:p>
                   </a:txBody>
@@ -17310,7 +17118,7 @@
                           </a:solidFill>
                           <a:latin typeface="Calibri"/>
                         </a:rPr>
-                        <a:t>The rate stands on a handful of orders.</a:t>
+                        <a:t>The rate stands on a handful of orders from few customers.</a:t>
                       </a:r>
                     </a:p>
                   </a:txBody>
@@ -17332,7 +17140,7 @@
                           </a:solidFill>
                           <a:latin typeface="Calibri"/>
                         </a:rPr>
-                        <a:t>"Not yet: no budget moves until thirty orders a quarter."</a:t>
+                        <a:t>"Not yet: no budget moves until more customers buy."</a:t>
                       </a:r>
                     </a:p>
                   </a:txBody>
@@ -17417,7 +17225,7 @@
       </p:graphicFrame>
       <p:pic>
         <p:nvPicPr>
-          <p:cNvPr id="10" name="mermaid diagram" descr="1fc994b101292e2a.png"/>
+          <p:cNvPr id="10" name="mermaid diagram" descr="d4d4686dcb4abbed.png"/>
           <p:cNvPicPr>
             <a:picLocks noChangeAspect="1"/>
           </p:cNvPicPr>
@@ -17431,8 +17239,8 @@
         </p:blipFill>
         <p:spPr>
           <a:xfrm>
-            <a:off x="2152497" y="3929888"/>
-            <a:ext cx="7886700" cy="1357312"/>
+            <a:off x="2509685" y="3929888"/>
+            <a:ext cx="7172325" cy="871537"/>
           </a:xfrm>
           <a:prstGeom prst="rect">
             <a:avLst/>
@@ -18584,7 +18392,7 @@
                 </a:solidFill>
                 <a:latin typeface="Calibri"/>
               </a:rPr>
-              <a:t>Week 1 Day 4: did the discount work</a:t>
+              <a:t>Week 1, Day 4. Did the discount work?</a:t>
             </a:r>
           </a:p>
         </p:txBody>
@@ -18867,7 +18675,7 @@
       </p:sp>
       <p:pic>
         <p:nvPicPr>
-          <p:cNvPr id="9" name="mermaid diagram" descr="73411f15259b9d96.png"/>
+          <p:cNvPr id="9" name="mermaid diagram" descr="d25f8da928b4b702.png"/>
           <p:cNvPicPr>
             <a:picLocks noChangeAspect="1"/>
           </p:cNvPicPr>
@@ -18881,8 +18689,8 @@
         </p:blipFill>
         <p:spPr>
           <a:xfrm>
-            <a:off x="530352" y="2001342"/>
-            <a:ext cx="4786326" cy="3879443"/>
+            <a:off x="4495647" y="1682496"/>
+            <a:ext cx="3200400" cy="2628900"/>
           </a:xfrm>
           <a:prstGeom prst="rect">
             <a:avLst/>
@@ -18897,8 +18705,8 @@
         </p:nvSpPr>
         <p:spPr>
           <a:xfrm>
-            <a:off x="5761917" y="1956816"/>
-            <a:ext cx="5899425" cy="2674620"/>
+            <a:off x="530352" y="4457700"/>
+            <a:ext cx="11130991" cy="1607820"/>
           </a:xfrm>
           <a:prstGeom prst="roundRect">
             <a:avLst>
@@ -18945,8 +18753,8 @@
         </p:nvSpPr>
         <p:spPr>
           <a:xfrm>
-            <a:off x="5908221" y="2084832"/>
-            <a:ext cx="45720" cy="2418587"/>
+            <a:off x="676656" y="4585716"/>
+            <a:ext cx="45720" cy="1351788"/>
           </a:xfrm>
           <a:prstGeom prst="roundRect">
             <a:avLst>
@@ -18991,8 +18799,8 @@
         </p:nvSpPr>
         <p:spPr>
           <a:xfrm>
-            <a:off x="6109389" y="2075688"/>
-            <a:ext cx="5332497" cy="2491739"/>
+            <a:off x="877824" y="4576572"/>
+            <a:ext cx="10564063" cy="1424940"/>
           </a:xfrm>
           <a:prstGeom prst="rect">
             <a:avLst/>
@@ -21822,7 +21630,7 @@
                 </a:solidFill>
                 <a:latin typeface="Calibri"/>
               </a:rPr>
-              <a:t>Week 1 Day 4: did the discount work</a:t>
+              <a:t>Week 1, Day 4. Did the discount work?</a:t>
             </a:r>
           </a:p>
         </p:txBody>
@@ -22302,7 +22110,7 @@
       </p:sp>
       <p:pic>
         <p:nvPicPr>
-          <p:cNvPr id="14" name="mermaid diagram" descr="589745ed8f180763.png"/>
+          <p:cNvPr id="14" name="mermaid diagram" descr="9421cdf902bd2252.png"/>
           <p:cNvPicPr>
             <a:picLocks noChangeAspect="1"/>
           </p:cNvPicPr>
@@ -22316,8 +22124,8 @@
         </p:blipFill>
         <p:spPr>
           <a:xfrm>
-            <a:off x="980922" y="3502152"/>
-            <a:ext cx="10229850" cy="1357312"/>
+            <a:off x="1188091" y="3502152"/>
+            <a:ext cx="9815512" cy="871537"/>
           </a:xfrm>
           <a:prstGeom prst="rect">
             <a:avLst/>
@@ -23296,7 +23104,7 @@
                 </a:solidFill>
                 <a:latin typeface="Calibri"/>
               </a:rPr>
-              <a:t>Compute Rs 4,850 and Rs 3,200 from the exposure table.</a:t>
+              <a:t>Compute Rs 4,850 and Rs 3,200 from the platform's list.</a:t>
             </a:r>
           </a:p>
         </p:txBody>
@@ -23983,7 +23791,7 @@
                 </a:solidFill>
                 <a:latin typeface="Calibri"/>
               </a:rPr>
-              <a:t>One reply to Marketing, in two sentences, with the Diwali hold-back offered.</a:t>
+              <a:t>What the sale cost at list price, and the Diwali hold-back offered, in two sentences.</a:t>
             </a:r>
           </a:p>
         </p:txBody>
@@ -24698,7 +24506,7 @@
                 </a:solidFill>
                 <a:latin typeface="Georgia"/>
               </a:rPr>
-              <a:t>Monday's rule returns: what 15 percent off costs</a:t>
+              <a:t>What 15 percent off cost, at list price</a:t>
             </a:r>
           </a:p>
         </p:txBody>
@@ -24733,14 +24541,14 @@
                 </a:solidFill>
                 <a:latin typeface="Calibri"/>
               </a:rPr>
-              <a:t>A discount of 15 percent needs 17.6 percent more volume just to stand still.</a:t>
+              <a:t>Marketing's own blend, read at list price, shows the exposed paying Kalpa less per customer.</a:t>
             </a:r>
           </a:p>
         </p:txBody>
       </p:sp>
       <p:pic>
         <p:nvPicPr>
-          <p:cNvPr id="9" name="mermaid diagram" descr="63a1ff08609e9cc3.png"/>
+          <p:cNvPr id="9" name="mermaid diagram" descr="c0463b1159b82124.png"/>
           <p:cNvPicPr>
             <a:picLocks noChangeAspect="1"/>
           </p:cNvPicPr>
@@ -24754,8 +24562,8 @@
         </p:blipFill>
         <p:spPr>
           <a:xfrm>
-            <a:off x="780897" y="1956816"/>
-            <a:ext cx="10629900" cy="1600200"/>
+            <a:off x="530352" y="1956816"/>
+            <a:ext cx="11130991" cy="1118763"/>
           </a:xfrm>
           <a:prstGeom prst="rect">
             <a:avLst/>
@@ -24770,8 +24578,8 @@
         </p:nvSpPr>
         <p:spPr>
           <a:xfrm>
-            <a:off x="530352" y="3703320"/>
-            <a:ext cx="11130991" cy="1121664"/>
+            <a:off x="530352" y="3221883"/>
+            <a:ext cx="11130991" cy="1380744"/>
           </a:xfrm>
           <a:prstGeom prst="roundRect">
             <a:avLst>
@@ -24824,7 +24632,7 @@
         </p:nvSpPr>
         <p:spPr>
           <a:xfrm>
-            <a:off x="758952" y="4035552"/>
+            <a:off x="758952" y="3683655"/>
             <a:ext cx="457200" cy="457200"/>
           </a:xfrm>
           <a:prstGeom prst="ellipse">
@@ -24876,7 +24684,7 @@
         </p:blipFill>
         <p:spPr>
           <a:xfrm>
-            <a:off x="868680" y="4145280"/>
+            <a:off x="868680" y="3793383"/>
             <a:ext cx="237744" cy="237744"/>
           </a:xfrm>
           <a:prstGeom prst="rect">
@@ -24892,7 +24700,7 @@
         </p:nvSpPr>
         <p:spPr>
           <a:xfrm>
-            <a:off x="1399031" y="3849624"/>
+            <a:off x="1399031" y="3368187"/>
             <a:ext cx="9987991" cy="160401"/>
           </a:xfrm>
           <a:prstGeom prst="rect">
@@ -24927,8 +24735,8 @@
         </p:nvSpPr>
         <p:spPr>
           <a:xfrm>
-            <a:off x="1399031" y="4069080"/>
-            <a:ext cx="9987991" cy="682752"/>
+            <a:off x="1399031" y="3587643"/>
+            <a:ext cx="9987991" cy="941832"/>
           </a:xfrm>
           <a:prstGeom prst="rect">
             <a:avLst/>
@@ -24948,7 +24756,7 @@
                 </a:solidFill>
                 <a:latin typeface="Calibri"/>
               </a:rPr>
-              <a:t>Even a real lift has to clear the discount's cost. Ask Marketing for the volume lift, and set it against 17.6 percent.</a:t>
+              <a:t>Even a real lift has to clear the discount's cost: at 15 percent off, Monday's rule asks for about 17.6 percent more volume just to stand still. Ask Marketing which way the list counts before anyone argues.</a:t>
             </a:r>
           </a:p>
         </p:txBody>
@@ -26098,7 +25906,7 @@
                 </a:solidFill>
                 <a:latin typeface="Calibri"/>
               </a:rPr>
-              <a:t>Week 1 Day 4: did the discount work</a:t>
+              <a:t>Week 1, Day 4. Did the discount work?</a:t>
             </a:r>
           </a:p>
         </p:txBody>
@@ -26729,7 +26537,7 @@
       </p:graphicFrame>
       <p:pic>
         <p:nvPicPr>
-          <p:cNvPr id="10" name="mermaid diagram" descr="440201f62e03ea24.png"/>
+          <p:cNvPr id="10" name="mermaid diagram" descr="988e2b90a862be54.png"/>
           <p:cNvPicPr>
             <a:picLocks noChangeAspect="1"/>
           </p:cNvPicPr>
@@ -26743,8 +26551,8 @@
         </p:blipFill>
         <p:spPr>
           <a:xfrm>
-            <a:off x="2152497" y="4438904"/>
-            <a:ext cx="7886700" cy="1100137"/>
+            <a:off x="3109760" y="4438904"/>
+            <a:ext cx="5972175" cy="614362"/>
           </a:xfrm>
           <a:prstGeom prst="rect">
             <a:avLst/>
@@ -27788,7 +27596,7 @@
                           </a:solidFill>
                           <a:latin typeface="Calibri"/>
                         </a:rPr>
-                        <a:t>Design: a shuffle test, a textbook test, a bootstrap range or wait a quarter; which do you choose for Monday, sized how, and what would switch it?</a:t>
+                        <a:t>Design: flip each pair, pool and shuffle, the textbook paired test, or wait a quarter; which for Monday, sized how, and what would switch it?</a:t>
                       </a:r>
                     </a:p>
                   </a:txBody>
@@ -31769,7 +31577,7 @@
                 </a:solidFill>
                 <a:latin typeface="Calibri"/>
               </a:rPr>
-              <a:t>Week 1 Day 4: did the discount work</a:t>
+              <a:t>Week 1, Day 4. Did the discount work?</a:t>
             </a:r>
           </a:p>
         </p:txBody>
@@ -32050,41 +31858,17 @@
           </a:p>
         </p:txBody>
       </p:sp>
-      <p:pic>
-        <p:nvPicPr>
-          <p:cNvPr id="9" name="mermaid diagram" descr="6bf5d51cf3950d02.png"/>
-          <p:cNvPicPr>
-            <a:picLocks noChangeAspect="1"/>
-          </p:cNvPicPr>
-          <p:nvPr/>
-        </p:nvPicPr>
-        <p:blipFill>
-          <a:blip r:embed="rId5"/>
-          <a:stretch>
-            <a:fillRect/>
-          </a:stretch>
-        </p:blipFill>
-        <p:spPr>
-          <a:xfrm>
-            <a:off x="530352" y="1973352"/>
-            <a:ext cx="4786326" cy="3935423"/>
-          </a:xfrm>
-          <a:prstGeom prst="rect">
-            <a:avLst/>
-          </a:prstGeom>
-        </p:spPr>
-      </p:pic>
       <p:graphicFrame>
         <p:nvGraphicFramePr>
-          <p:cNvPr id="10" name="Table 9"/>
+          <p:cNvPr id="9" name="Table 8"/>
           <p:cNvGraphicFramePr>
             <a:graphicFrameLocks noGrp="1"/>
           </p:cNvGraphicFramePr>
           <p:nvPr/>
         </p:nvGraphicFramePr>
         <p:xfrm>
-          <a:off x="5761917" y="1956816"/>
-          <a:ext cx="5899424" cy="2204720"/>
+          <a:off x="530352" y="1682496"/>
+          <a:ext cx="11130990" cy="1243584"/>
         </p:xfrm>
         <a:graphic>
           <a:graphicData uri="http://schemas.openxmlformats.org/drawingml/2006/table">
@@ -32093,17 +31877,17 @@
                 <a:tableStyleId>{2D5ABB26-0587-4C30-8999-92F81FD0307C}</a:tableStyleId>
               </a:tblPr>
               <a:tblGrid>
-                <a:gridCol w="1827260"/>
-                <a:gridCol w="4072164"/>
+                <a:gridCol w="2138586"/>
+                <a:gridCol w="8992404"/>
               </a:tblGrid>
-              <a:tr h="369824">
+              <a:tr h="310896">
                 <a:tc>
                   <a:txBody>
                     <a:bodyPr/>
                     <a:lstStyle/>
                     <a:p>
                       <a:r>
-                        <a:rPr sz="1450" b="1" i="0">
+                        <a:rPr sz="950" b="1" i="0">
                           <a:solidFill>
                             <a:srgbClr val="FFFFFF"/>
                           </a:solidFill>
@@ -32125,7 +31909,7 @@
                     <a:lstStyle/>
                     <a:p>
                       <a:r>
-                        <a:rPr sz="1450" b="1" i="0">
+                        <a:rPr sz="950" b="1" i="0">
                           <a:solidFill>
                             <a:srgbClr val="FFFFFF"/>
                           </a:solidFill>
@@ -32142,14 +31926,14 @@
                   </a:tcPr>
                 </a:tc>
               </a:tr>
-              <a:tr h="611632">
+              <a:tr h="310896">
                 <a:tc>
                   <a:txBody>
                     <a:bodyPr/>
                     <a:lstStyle/>
                     <a:p>
                       <a:r>
-                        <a:rPr sz="1400" b="0" i="0">
+                        <a:rPr sz="900" b="0" i="0">
                           <a:solidFill>
                             <a:srgbClr val="1A1440"/>
                           </a:solidFill>
@@ -32171,7 +31955,7 @@
                     <a:lstStyle/>
                     <a:p>
                       <a:r>
-                        <a:rPr sz="1400" b="0" i="0">
+                        <a:rPr sz="900" b="0" i="0">
                           <a:solidFill>
                             <a:srgbClr val="1A1440"/>
                           </a:solidFill>
@@ -32188,14 +31972,14 @@
                   </a:tcPr>
                 </a:tc>
               </a:tr>
-              <a:tr h="611632">
+              <a:tr h="310896">
                 <a:tc>
                   <a:txBody>
                     <a:bodyPr/>
                     <a:lstStyle/>
                     <a:p>
                       <a:r>
-                        <a:rPr sz="1400" b="0" i="0">
+                        <a:rPr sz="900" b="0" i="0">
                           <a:solidFill>
                             <a:srgbClr val="1A1440"/>
                           </a:solidFill>
@@ -32217,7 +32001,7 @@
                     <a:lstStyle/>
                     <a:p>
                       <a:r>
-                        <a:rPr sz="1400" b="0" i="0">
+                        <a:rPr sz="900" b="0" i="0">
                           <a:solidFill>
                             <a:srgbClr val="1A1440"/>
                           </a:solidFill>
@@ -32234,14 +32018,14 @@
                   </a:tcPr>
                 </a:tc>
               </a:tr>
-              <a:tr h="611632">
+              <a:tr h="310896">
                 <a:tc>
                   <a:txBody>
                     <a:bodyPr/>
                     <a:lstStyle/>
                     <a:p>
                       <a:r>
-                        <a:rPr sz="1400" b="0" i="0">
+                        <a:rPr sz="900" b="0" i="0">
                           <a:solidFill>
                             <a:srgbClr val="1A1440"/>
                           </a:solidFill>
@@ -32263,7 +32047,7 @@
                     <a:lstStyle/>
                     <a:p>
                       <a:r>
-                        <a:rPr sz="1400" b="0" i="0">
+                        <a:rPr sz="900" b="0" i="0">
                           <a:solidFill>
                             <a:srgbClr val="1A1440"/>
                           </a:solidFill>
@@ -32284,6 +32068,30 @@
           </a:graphicData>
         </a:graphic>
       </p:graphicFrame>
+      <p:pic>
+        <p:nvPicPr>
+          <p:cNvPr id="10" name="mermaid diagram" descr="86e4d29d83a6a88b.png"/>
+          <p:cNvPicPr>
+            <a:picLocks noChangeAspect="1"/>
+          </p:cNvPicPr>
+          <p:nvPr/>
+        </p:nvPicPr>
+        <p:blipFill>
+          <a:blip r:embed="rId5"/>
+          <a:stretch>
+            <a:fillRect/>
+          </a:stretch>
+        </p:blipFill>
+        <p:spPr>
+          <a:xfrm>
+            <a:off x="3931291" y="3182112"/>
+            <a:ext cx="4329112" cy="2971800"/>
+          </a:xfrm>
+          <a:prstGeom prst="rect">
+            <a:avLst/>
+          </a:prstGeom>
+        </p:spPr>
+      </p:pic>
       <p:sp>
         <p:nvSpPr>
           <p:cNvPr id="11" name="Oval 10"/>
@@ -33044,7 +32852,7 @@
         </p:nvGraphicFramePr>
         <p:xfrm>
           <a:off x="530352" y="1956816"/>
-          <a:ext cx="11130991" cy="3314192"/>
+          <a:ext cx="11130991" cy="3556000"/>
         </p:xfrm>
         <a:graphic>
           <a:graphicData uri="http://schemas.openxmlformats.org/drawingml/2006/table">
@@ -33183,7 +32991,7 @@
                           </a:solidFill>
                           <a:latin typeface="Calibri"/>
                         </a:rPr>
-                        <a:t>Real and worth acting on are two separate calls: the shuffle answers the first, rupees against cost answer the second.</a:t>
+                        <a:t>Real and worth acting on are two separate calls: a chance reference answers the first, rupees against cost answer the second.</a:t>
                       </a:r>
                     </a:p>
                   </a:txBody>
@@ -33194,7 +33002,7 @@
                   </a:tcPr>
                 </a:tc>
               </a:tr>
-              <a:tr h="369824">
+              <a:tr h="611632">
                 <a:tc>
                   <a:txBody>
                     <a:bodyPr/>
@@ -33229,7 +33037,7 @@
                           </a:solidFill>
                           <a:latin typeface="Calibri"/>
                         </a:rPr>
-                        <a:t>Count what a rate stands on before you repeat it; under thirty, it is a lead.</a:t>
+                        <a:t>Count what a rate stands on, in customers as well as orders, before you repeat it; under thirty customers, it is a lead.</a:t>
                       </a:r>
                     </a:p>
                   </a:txBody>
@@ -35338,7 +35146,7 @@
         <p:spPr>
           <a:xfrm>
             <a:off x="530352" y="1956816"/>
-            <a:ext cx="11130991" cy="1121664"/>
+            <a:ext cx="11130991" cy="1380744"/>
           </a:xfrm>
           <a:prstGeom prst="roundRect">
             <a:avLst>
@@ -35397,7 +35205,7 @@
         </p:nvSpPr>
         <p:spPr>
           <a:xfrm>
-            <a:off x="758952" y="2289048"/>
+            <a:off x="758952" y="2418588"/>
             <a:ext cx="457200" cy="457200"/>
           </a:xfrm>
           <a:prstGeom prst="ellipse">
@@ -35449,7 +35257,7 @@
         </p:blipFill>
         <p:spPr>
           <a:xfrm>
-            <a:off x="868680" y="2398776"/>
+            <a:off x="868680" y="2528316"/>
             <a:ext cx="237744" cy="237744"/>
           </a:xfrm>
           <a:prstGeom prst="rect">
@@ -35501,7 +35309,7 @@
         <p:spPr>
           <a:xfrm>
             <a:off x="1399031" y="2322576"/>
-            <a:ext cx="9987991" cy="682752"/>
+            <a:ext cx="9987991" cy="941832"/>
           </a:xfrm>
           <a:prstGeom prst="rect">
             <a:avLst/>
@@ -35521,14 +35329,14 @@
                 </a:solidFill>
                 <a:latin typeface="Calibri"/>
               </a:rPr>
-              <a:t>"Can you do all of this again, alone, on a fresh export, and defend it to Marketing's face?" Meera Raghavan</a:t>
+              <a:t>"Before anything goes to Meera, rebuild the week from a raw export with no assistant and no notes. Then say it to me the way you will say it to her, because I will push the way Marketing will." Kavya Nair, senior analyst</a:t>
             </a:r>
           </a:p>
         </p:txBody>
       </p:sp>
       <p:pic>
         <p:nvPicPr>
-          <p:cNvPr id="14" name="mermaid diagram" descr="abacaaba7cddc90b.png"/>
+          <p:cNvPr id="14" name="mermaid diagram" descr="3ff81a21d5a68fb3.png"/>
           <p:cNvPicPr>
             <a:picLocks noChangeAspect="1"/>
           </p:cNvPicPr>
@@ -35542,8 +35350,8 @@
         </p:blipFill>
         <p:spPr>
           <a:xfrm>
-            <a:off x="530352" y="3243072"/>
-            <a:ext cx="11130991" cy="1129748"/>
+            <a:off x="1088078" y="3502152"/>
+            <a:ext cx="10015537" cy="871537"/>
           </a:xfrm>
           <a:prstGeom prst="rect">
             <a:avLst/>
@@ -36260,7 +36068,7 @@
                 </a:solidFill>
                 <a:latin typeface="Georgia"/>
               </a:rPr>
-              <a:t>eBay's ads went to people who would buy anyway</a:t>
+              <a:t>eBay tested its ads in controlled experiments</a:t>
             </a:r>
           </a:p>
         </p:txBody>
@@ -36309,7 +36117,7 @@
         <p:spPr>
           <a:xfrm>
             <a:off x="530352" y="1956816"/>
-            <a:ext cx="5474055" cy="1964436"/>
+            <a:ext cx="5474055" cy="2154428"/>
           </a:xfrm>
           <a:prstGeom prst="roundRect">
             <a:avLst>
@@ -36536,7 +36344,7 @@
         <p:spPr>
           <a:xfrm>
             <a:off x="6187287" y="1956816"/>
-            <a:ext cx="5474055" cy="1964436"/>
+            <a:ext cx="5474055" cy="2154428"/>
           </a:xfrm>
           <a:prstGeom prst="roundRect">
             <a:avLst>
@@ -36633,7 +36441,7 @@
       </p:sp>
       <p:pic>
         <p:nvPicPr>
-          <p:cNvPr id="17" name="Picture 16" descr="users_113eb2dd3269.png"/>
+          <p:cNvPr id="17" name="Picture 16" descr="scale_e4d6117bdfb8.png"/>
           <p:cNvPicPr>
             <a:picLocks noChangeAspect="1"/>
           </p:cNvPicPr>
@@ -36685,7 +36493,7 @@
                 </a:solidFill>
                 <a:latin typeface="Calibri"/>
               </a:rPr>
-              <a:t>OTHER SEARCH ADS</a:t>
+              <a:t>CONTROLLED AGAINST USUAL</a:t>
             </a:r>
           </a:p>
         </p:txBody>
@@ -36720,7 +36528,7 @@
                 </a:solidFill>
                 <a:latin typeface="Calibri"/>
               </a:rPr>
-              <a:t>Frequent buyers took most</a:t>
+              <a:t>A fraction of the credit</a:t>
             </a:r>
           </a:p>
         </p:txBody>
@@ -36734,7 +36542,7 @@
         <p:spPr>
           <a:xfrm>
             <a:off x="6388455" y="3303524"/>
-            <a:ext cx="5071719" cy="399796"/>
+            <a:ext cx="5071719" cy="581406"/>
           </a:xfrm>
           <a:prstGeom prst="rect">
             <a:avLst/>
@@ -36755,7 +36563,7 @@
                 </a:solidFill>
                 <a:latin typeface="Calibri"/>
               </a:rPr>
-              <a:t>The customers who saw most of the ads would have bought anyway, so the average return was negative.</a:t>
+              <a:t>Because search clicks and purchases go together, the returns a controlled test found were a fraction of what the usual readings had credited.</a:t>
             </a:r>
           </a:p>
         </p:txBody>
@@ -36768,7 +36576,7 @@
         </p:nvSpPr>
         <p:spPr>
           <a:xfrm>
-            <a:off x="530352" y="4104132"/>
+            <a:off x="530352" y="4294124"/>
             <a:ext cx="11130991" cy="772160"/>
           </a:xfrm>
           <a:prstGeom prst="rect">
@@ -37544,7 +37352,7 @@
                 </a:solidFill>
                 <a:latin typeface="Calibri"/>
               </a:rPr>
-              <a:t>Each compares two things, and each assumes something about what else was going on.</a:t>
+              <a:t>Each compares two things on one of two files, and each assumes something about what else happened.</a:t>
             </a:r>
           </a:p>
         </p:txBody>
@@ -37568,9 +37376,9 @@
                 <a:tableStyleId>{2D5ABB26-0587-4C30-8999-92F81FD0307C}</a:tableStyleId>
               </a:tblPr>
               <a:tblGrid>
-                <a:gridCol w="2969184"/>
-                <a:gridCol w="3591747"/>
-                <a:gridCol w="4570059"/>
+                <a:gridCol w="2558285"/>
+                <a:gridCol w="4635088"/>
+                <a:gridCol w="3937617"/>
               </a:tblGrid>
               <a:tr h="369824">
                 <a:tc>
@@ -37675,7 +37483,7 @@
                           </a:solidFill>
                           <a:latin typeface="Calibri"/>
                         </a:rPr>
-                        <a:t>13 Retail-Plus orders, July and August</a:t>
+                        <a:t>Finance's file: 13 Retail-Plus orders, July and August</a:t>
                       </a:r>
                     </a:p>
                   </a:txBody>
@@ -37743,7 +37551,7 @@
                           </a:solidFill>
                           <a:latin typeface="Calibri"/>
                         </a:rPr>
-                        <a:t>31 orders, Retail-Plus and Retail-Core</a:t>
+                        <a:t>Finance's file: 31 orders, Retail-Plus and Retail-Core</a:t>
                       </a:r>
                     </a:p>
                   </a:txBody>
@@ -37811,7 +37619,7 @@
                           </a:solidFill>
                           <a:latin typeface="Calibri"/>
                         </a:rPr>
-                        <a:t>160 customers, chapter 4</a:t>
+                        <a:t>The platform's list: 160 customers, chapter 4</a:t>
                       </a:r>
                     </a:p>
                   </a:txBody>
@@ -37879,7 +37687,7 @@
                           </a:solidFill>
                           <a:latin typeface="Calibri"/>
                         </a:rPr>
-                        <a:t>a fifth of 70 Retail-Plus customers</a:t>
+                        <a:t>The platform's list: a fifth of its 70 Retail-Plus customers</a:t>
                       </a:r>
                     </a:p>
                   </a:txBody>
@@ -37918,7 +37726,46 @@
       </p:graphicFrame>
       <p:sp>
         <p:nvSpPr>
-          <p:cNvPr id="10" name="Oval 9"/>
+          <p:cNvPr id="10" name="TextBox 9"/>
+          <p:cNvSpPr txBox="1"/>
+          <p:nvPr/>
+        </p:nvSpPr>
+        <p:spPr>
+          <a:xfrm>
+            <a:off x="530352" y="5029200"/>
+            <a:ext cx="11130991" cy="772160"/>
+          </a:xfrm>
+          <a:prstGeom prst="rect">
+            <a:avLst/>
+          </a:prstGeom>
+          <a:noFill/>
+        </p:spPr>
+        <p:txBody>
+          <a:bodyPr wrap="square" anchor="t" lIns="0" rIns="0" tIns="0" bIns="0">
+            <a:spAutoFit/>
+          </a:bodyPr>
+          <a:lstStyle/>
+          <a:p>
+            <a:pPr>
+              <a:spcAft>
+                <a:spcPts val="800"/>
+              </a:spcAft>
+            </a:pPr>
+            <a:r>
+              <a:rPr sz="1600" b="0" i="0">
+                <a:solidFill>
+                  <a:srgbClr val="1A1440"/>
+                </a:solidFill>
+                <a:latin typeface="Calibri"/>
+              </a:rPr>
+              <a:t>The platform's list records who received the sale, under its own ids, and cannot be matched to Finance's order file, so each option stands on the file that can answer it.</a:t>
+            </a:r>
+          </a:p>
+        </p:txBody>
+      </p:sp>
+      <p:sp>
+        <p:nvSpPr>
+          <p:cNvPr id="11" name="Oval 10"/>
           <p:cNvSpPr/>
           <p:nvPr/>
         </p:nvSpPr>
@@ -37962,7 +37809,7 @@
       </p:sp>
       <p:sp>
         <p:nvSpPr>
-          <p:cNvPr id="11" name="TextBox 10"/>
+          <p:cNvPr id="12" name="TextBox 11"/>
           <p:cNvSpPr txBox="1"/>
           <p:nvPr/>
         </p:nvSpPr>
@@ -37997,7 +37844,7 @@
       </p:sp>
       <p:sp>
         <p:nvSpPr>
-          <p:cNvPr id="12" name="Oval 11"/>
+          <p:cNvPr id="13" name="Oval 12"/>
           <p:cNvSpPr/>
           <p:nvPr/>
         </p:nvSpPr>
@@ -38041,7 +37888,7 @@
       </p:sp>
       <p:sp>
         <p:nvSpPr>
-          <p:cNvPr id="13" name="TextBox 12"/>
+          <p:cNvPr id="14" name="TextBox 13"/>
           <p:cNvSpPr txBox="1"/>
           <p:nvPr/>
         </p:nvSpPr>
@@ -38076,7 +37923,7 @@
       </p:sp>
       <p:sp>
         <p:nvSpPr>
-          <p:cNvPr id="14" name="Oval 13"/>
+          <p:cNvPr id="15" name="Oval 14"/>
           <p:cNvSpPr/>
           <p:nvPr/>
         </p:nvSpPr>
@@ -38120,7 +37967,7 @@
       </p:sp>
       <p:sp>
         <p:nvSpPr>
-          <p:cNvPr id="15" name="TextBox 14"/>
+          <p:cNvPr id="16" name="TextBox 15"/>
           <p:cNvSpPr txBox="1"/>
           <p:nvPr/>
         </p:nvSpPr>
@@ -38155,7 +38002,7 @@
       </p:sp>
       <p:sp>
         <p:nvSpPr>
-          <p:cNvPr id="16" name="Oval 15"/>
+          <p:cNvPr id="17" name="Oval 16"/>
           <p:cNvSpPr/>
           <p:nvPr/>
         </p:nvSpPr>
@@ -38199,7 +38046,7 @@
       </p:sp>
       <p:sp>
         <p:nvSpPr>
-          <p:cNvPr id="17" name="TextBox 16"/>
+          <p:cNvPr id="18" name="TextBox 17"/>
           <p:cNvSpPr txBox="1"/>
           <p:nvPr/>
         </p:nvSpPr>
@@ -38234,7 +38081,7 @@
       </p:sp>
       <p:sp>
         <p:nvSpPr>
-          <p:cNvPr id="18" name="Oval 17"/>
+          <p:cNvPr id="19" name="Oval 18"/>
           <p:cNvSpPr/>
           <p:nvPr/>
         </p:nvSpPr>
@@ -38278,7 +38125,7 @@
       </p:sp>
       <p:sp>
         <p:nvSpPr>
-          <p:cNvPr id="19" name="TextBox 18"/>
+          <p:cNvPr id="20" name="TextBox 19"/>
           <p:cNvSpPr txBox="1"/>
           <p:nvPr/>
         </p:nvSpPr>
@@ -38313,7 +38160,7 @@
       </p:sp>
       <p:sp>
         <p:nvSpPr>
-          <p:cNvPr id="20" name="Oval 19"/>
+          <p:cNvPr id="21" name="Oval 20"/>
           <p:cNvSpPr/>
           <p:nvPr/>
         </p:nvSpPr>
@@ -38357,7 +38204,7 @@
       </p:sp>
       <p:sp>
         <p:nvSpPr>
-          <p:cNvPr id="21" name="TextBox 20"/>
+          <p:cNvPr id="22" name="TextBox 21"/>
           <p:cNvSpPr txBox="1"/>
           <p:nvPr/>
         </p:nvSpPr>
@@ -38392,7 +38239,7 @@
       </p:sp>
       <p:sp>
         <p:nvSpPr>
-          <p:cNvPr id="22" name="TextBox 21"/>
+          <p:cNvPr id="23" name="TextBox 22"/>
           <p:cNvSpPr txBox="1"/>
           <p:nvPr/>
         </p:nvSpPr>
@@ -38668,7 +38515,7 @@
       </p:sp>
       <p:pic>
         <p:nvPicPr>
-          <p:cNvPr id="9" name="mermaid diagram" descr="f5ebc56372b0c601.png"/>
+          <p:cNvPr id="9" name="mermaid diagram" descr="734903d7c091b47e.png"/>
           <p:cNvPicPr>
             <a:picLocks noChangeAspect="1"/>
           </p:cNvPicPr>
@@ -38682,8 +38529,8 @@
         </p:blipFill>
         <p:spPr>
           <a:xfrm>
-            <a:off x="670837" y="1664208"/>
-            <a:ext cx="10850019" cy="3517392"/>
+            <a:off x="530352" y="1956816"/>
+            <a:ext cx="11130991" cy="1974853"/>
           </a:xfrm>
           <a:prstGeom prst="rect">
             <a:avLst/>
@@ -38698,7 +38545,7 @@
         </p:nvSpPr>
         <p:spPr>
           <a:xfrm>
-            <a:off x="530352" y="5227320"/>
+            <a:off x="530352" y="4077973"/>
             <a:ext cx="11130991" cy="807720"/>
           </a:xfrm>
           <a:prstGeom prst="roundRect">
@@ -38746,7 +38593,7 @@
         </p:nvSpPr>
         <p:spPr>
           <a:xfrm>
-            <a:off x="676656" y="5355336"/>
+            <a:off x="676656" y="4205989"/>
             <a:ext cx="45720" cy="551688"/>
           </a:xfrm>
           <a:prstGeom prst="roundRect">
@@ -38792,7 +38639,7 @@
         </p:nvSpPr>
         <p:spPr>
           <a:xfrm>
-            <a:off x="877824" y="5346192"/>
+            <a:off x="877824" y="4196845"/>
             <a:ext cx="10564063" cy="624840"/>
           </a:xfrm>
           <a:prstGeom prst="rect">
@@ -39572,14 +39419,14 @@
                 </a:solidFill>
                 <a:latin typeface="Calibri"/>
               </a:rPr>
-              <a:t>The campaigns table says who it was aimed at; the exposure table says who received it.</a:t>
+              <a:t>The campaigns table says whom it was aimed at; the platform's list records who received it.</a:t>
             </a:r>
           </a:p>
         </p:txBody>
       </p:sp>
       <p:pic>
         <p:nvPicPr>
-          <p:cNvPr id="9" name="mermaid diagram" descr="cb21b03f314d83e0.png"/>
+          <p:cNvPr id="9" name="mermaid diagram" descr="92d9c1bece015996.png"/>
           <p:cNvPicPr>
             <a:picLocks noChangeAspect="1"/>
           </p:cNvPicPr>
@@ -39593,8 +39440,8 @@
         </p:blipFill>
         <p:spPr>
           <a:xfrm>
-            <a:off x="3542901" y="1664208"/>
-            <a:ext cx="5105891" cy="3517392"/>
+            <a:off x="3709835" y="1956816"/>
+            <a:ext cx="4772025" cy="1800225"/>
           </a:xfrm>
           <a:prstGeom prst="rect">
             <a:avLst/>
@@ -39609,7 +39456,7 @@
         </p:nvSpPr>
         <p:spPr>
           <a:xfrm>
-            <a:off x="530352" y="5227320"/>
+            <a:off x="530352" y="3903345"/>
             <a:ext cx="11130991" cy="807720"/>
           </a:xfrm>
           <a:prstGeom prst="roundRect">
@@ -39657,7 +39504,7 @@
         </p:nvSpPr>
         <p:spPr>
           <a:xfrm>
-            <a:off x="676656" y="5355336"/>
+            <a:off x="676656" y="4031360"/>
             <a:ext cx="45720" cy="551688"/>
           </a:xfrm>
           <a:prstGeom prst="roundRect">
@@ -39703,7 +39550,7 @@
         </p:nvSpPr>
         <p:spPr>
           <a:xfrm>
-            <a:off x="877824" y="5346192"/>
+            <a:off x="877824" y="4022217"/>
             <a:ext cx="10564063" cy="624840"/>
           </a:xfrm>
           <a:prstGeom prst="rect">
@@ -40490,7 +40337,7 @@
       </p:sp>
       <p:pic>
         <p:nvPicPr>
-          <p:cNvPr id="9" name="mermaid diagram" descr="808a0e4d09182de9.png"/>
+          <p:cNvPr id="9" name="mermaid diagram" descr="40748c5bfa3dbe0a.png"/>
           <p:cNvPicPr>
             <a:picLocks noChangeAspect="1"/>
           </p:cNvPicPr>
@@ -40541,7 +40388,7 @@
                 </a:solidFill>
                 <a:latin typeface="Calibri"/>
               </a:rPr>
-              <a:t>The answer is b. Whatever rule chose them, it was a rule and never a coin, and a rule can pick the customers who were going to buy anyway.</a:t>
+              <a:t>The answer is b. Whatever chose them was a rule, and a rule can pick the customers who were going to buy anyway.</a:t>
             </a:r>
           </a:p>
         </p:txBody>
@@ -41298,7 +41145,7 @@
       </p:sp>
       <p:pic>
         <p:nvPicPr>
-          <p:cNvPr id="9" name="mermaid diagram" descr="4bad38cfce8f3232.png"/>
+          <p:cNvPr id="9" name="mermaid diagram" descr="814608db0dd47743.png"/>
           <p:cNvPicPr>
             <a:picLocks noChangeAspect="1"/>
           </p:cNvPicPr>
@@ -41312,8 +41159,8 @@
         </p:blipFill>
         <p:spPr>
           <a:xfrm>
-            <a:off x="780897" y="1956816"/>
-            <a:ext cx="10629900" cy="1357312"/>
+            <a:off x="1188091" y="1956816"/>
+            <a:ext cx="9815512" cy="1128712"/>
           </a:xfrm>
           <a:prstGeom prst="rect">
             <a:avLst/>
@@ -41328,7 +41175,7 @@
         </p:nvSpPr>
         <p:spPr>
           <a:xfrm>
-            <a:off x="530352" y="3460432"/>
+            <a:off x="530352" y="3231832"/>
             <a:ext cx="11130991" cy="1121664"/>
           </a:xfrm>
           <a:prstGeom prst="roundRect">
@@ -41382,7 +41229,7 @@
         </p:nvSpPr>
         <p:spPr>
           <a:xfrm>
-            <a:off x="758952" y="3792664"/>
+            <a:off x="758952" y="3564064"/>
             <a:ext cx="457200" cy="457200"/>
           </a:xfrm>
           <a:prstGeom prst="ellipse">
@@ -41434,7 +41281,7 @@
         </p:blipFill>
         <p:spPr>
           <a:xfrm>
-            <a:off x="868680" y="3902392"/>
+            <a:off x="868680" y="3673792"/>
             <a:ext cx="237744" cy="237744"/>
           </a:xfrm>
           <a:prstGeom prst="rect">
@@ -41450,7 +41297,7 @@
         </p:nvSpPr>
         <p:spPr>
           <a:xfrm>
-            <a:off x="1399031" y="3606736"/>
+            <a:off x="1399031" y="3378136"/>
             <a:ext cx="9987991" cy="160401"/>
           </a:xfrm>
           <a:prstGeom prst="rect">
@@ -41485,7 +41332,7 @@
         </p:nvSpPr>
         <p:spPr>
           <a:xfrm>
-            <a:off x="1399031" y="3826192"/>
+            <a:off x="1399031" y="3597592"/>
             <a:ext cx="9987991" cy="682752"/>
           </a:xfrm>
           <a:prstGeom prst="rect">

--- a/content/W01/D4/slides/C2_W01_D04_half2_STUDENT.pptx
+++ b/content/W01/D4/slides/C2_W01_D04_half2_STUDENT.pptx
@@ -785,42 +785,42 @@
           <a:lstStyle/>
           <a:p>
             <a:r>
-              <a:t>LIVE, 4 minutes. Meet the two lists head-on. The morning offered the retention test to "the whole</a:t>
-            </a:r>
-          </a:p>
-          <a:p>
-            <a:r>
-              <a:t>tier" of 22, and this hold-back takes 14 of 70. Both are right: the 22 are Finance's order file, where</a:t>
-            </a:r>
-          </a:p>
-          <a:p>
-            <a:r>
-              <a:t>Retail-Plus members delivered about Rs 1,139 each in August; the 70 are the platform's list, where</a:t>
-            </a:r>
-          </a:p>
-          <a:p>
-            <a:r>
-              <a:t>Retail-Plus customers who did not get the sale averaged Rs 5,000. Different ids and different</a:t>
-            </a:r>
-          </a:p>
-          <a:p>
-            <a:r>
-              <a:t>measures, delivered revenue per member against the platform's average spend, so neither checks the</a:t>
-            </a:r>
-          </a:p>
-          <a:p>
-            <a:r>
-              <a:t>other. Fourteen are too few to see a 6 percent lift; sizing a hold-back is power, which comes later.</a:t>
-            </a:r>
-          </a:p>
-          <a:p>
-            <a:r>
-              <a:t>Chance decides who gets the sale, so the groups are alike in everything else on average, including</a:t>
-            </a:r>
-          </a:p>
-          <a:p>
-            <a:r>
-              <a:t>who was going to buy anyway.</a:t>
+              <a:t>LIVE, 4 minutes. Meet the two lists head-on. The morning priced the retention offer on "the whole</a:t>
+            </a:r>
+          </a:p>
+          <a:p>
+            <a:r>
+              <a:t>tier" of 22 and tests it on half of them, and this hold-back takes 14 of 70. Both are right: the 22</a:t>
+            </a:r>
+          </a:p>
+          <a:p>
+            <a:r>
+              <a:t>are Finance's order file, where Retail-Plus members delivered about Rs 1,139 each in August; the 70</a:t>
+            </a:r>
+          </a:p>
+          <a:p>
+            <a:r>
+              <a:t>are the platform's list, where Retail-Plus customers who did not get the sale averaged Rs 5,000.</a:t>
+            </a:r>
+          </a:p>
+          <a:p>
+            <a:r>
+              <a:t>Different ids and different measures, delivered revenue per member against the platform's average</a:t>
+            </a:r>
+          </a:p>
+          <a:p>
+            <a:r>
+              <a:t>spend, so neither checks the other. Fourteen are too few to see a 6 percent lift; sizing a hold-back</a:t>
+            </a:r>
+          </a:p>
+          <a:p>
+            <a:r>
+              <a:t>is power, which comes later. Chance decides who gets the sale, so the groups are alike in everything</a:t>
+            </a:r>
+          </a:p>
+          <a:p>
+            <a:r>
+              <a:t>else on average, including who was going to buy anyway.</a:t>
             </a:r>
           </a:p>
         </p:txBody>
@@ -1820,7 +1820,7 @@
           <a:lstStyle/>
           <a:p>
             <a:r>
-              <a:t>LIVE, 2 minutes. Move 4 is spoken, never written first. The partner playing Marketing is allowed to</a:t>
+              <a:t>LIVE, 2 minutes. Move 4 is spoken before anything is written. The partner playing Marketing is allowed to</a:t>
             </a:r>
           </a:p>
           <a:p>

--- a/content/W01/D4/slides/C2_W01_D04_half2_STUDENT.pptx
+++ b/content/W01/D4/slides/C2_W01_D04_half2_STUDENT.pptx
@@ -2008,7 +2008,7 @@
           <a:lstStyle/>
           <a:p>
             <a:r>
-              <a:t>LIVE, 3 minutes. Move 4 is spoken before anything is written. The partner playing Marketing is</a:t>
+              <a:t>LIVE, 3 minutes. Part 4 is spoken before anything is written. The partner playing Marketing is</a:t>
             </a:r>
           </a:p>
           <a:p>
@@ -2183,7 +2183,7 @@
           </a:p>
           <a:p>
             <a:r>
-              <a:t>Notebook ex2, move 4, computes the 9.8 percent. Then the interview drill.</a:t>
+              <a:t>Notebook ex2, part 4, computes the 9.8 percent. Then the interview drill.</a:t>
             </a:r>
           </a:p>
         </p:txBody>
@@ -17087,7 +17087,7 @@
         <p:spPr>
           <a:xfrm>
             <a:off x="694944" y="2990088"/>
-            <a:ext cx="1750710" cy="251205"/>
+            <a:ext cx="1750710" cy="465836"/>
           </a:xfrm>
           <a:prstGeom prst="rect">
             <a:avLst/>
@@ -17108,7 +17108,7 @@
                 </a:solidFill>
                 <a:latin typeface="Calibri"/>
               </a:rPr>
-              <a:t>Is it real?</a:t>
+              <a:t>More than the wobble?</a:t>
             </a:r>
           </a:p>
         </p:txBody>
@@ -17121,8 +17121,8 @@
         </p:nvSpPr>
         <p:spPr>
           <a:xfrm>
-            <a:off x="694944" y="3277870"/>
-            <a:ext cx="1750710" cy="531876"/>
+            <a:off x="694944" y="3492500"/>
+            <a:ext cx="1750710" cy="366776"/>
           </a:xfrm>
           <a:prstGeom prst="rect">
             <a:avLst/>
@@ -17143,7 +17143,7 @@
                 </a:solidFill>
                 <a:latin typeface="Calibri"/>
               </a:rPr>
-              <a:t>Retail-Plus, 5,000 flips, seed 2026, counted both ways.</a:t>
+              <a:t>The Retail-Plus fall, counted in both directions.</a:t>
             </a:r>
           </a:p>
         </p:txBody>
@@ -17290,7 +17290,7 @@
         <p:spPr>
           <a:xfrm>
             <a:off x="2957718" y="2990088"/>
-            <a:ext cx="1750710" cy="251205"/>
+            <a:ext cx="1750710" cy="465836"/>
           </a:xfrm>
           <a:prstGeom prst="rect">
             <a:avLst/>
@@ -17311,7 +17311,7 @@
                 </a:solidFill>
                 <a:latin typeface="Calibri"/>
               </a:rPr>
-              <a:t>Is it worth it?</a:t>
+              <a:t>How big, and who is tested?</a:t>
             </a:r>
           </a:p>
         </p:txBody>
@@ -17324,7 +17324,7 @@
         </p:nvSpPr>
         <p:spPr>
           <a:xfrm>
-            <a:off x="2957718" y="3277870"/>
+            <a:off x="2957718" y="3492500"/>
             <a:ext cx="1750710" cy="531876"/>
           </a:xfrm>
           <a:prstGeom prst="rect">
@@ -17346,7 +17346,7 @@
                 </a:solidFill>
                 <a:latin typeface="Calibri"/>
               </a:rPr>
-              <a:t>The fall against the company's quarter, and a coin-chosen half-tier test.</a:t>
+              <a:t>The fall against the company's quarter, and the offer's first test.</a:t>
             </a:r>
           </a:p>
         </p:txBody>
@@ -17514,7 +17514,7 @@
                 </a:solidFill>
                 <a:latin typeface="Calibri"/>
               </a:rPr>
-              <a:t>Can Student carry budget?</a:t>
+              <a:t>What stands behind 40%?</a:t>
             </a:r>
           </a:p>
         </p:txBody>
@@ -17528,7 +17528,7 @@
         <p:spPr>
           <a:xfrm>
             <a:off x="5220492" y="3492500"/>
-            <a:ext cx="1750710" cy="366776"/>
+            <a:ext cx="1750710" cy="531876"/>
           </a:xfrm>
           <a:prstGeom prst="rect">
             <a:avLst/>
@@ -17549,7 +17549,7 @@
                 </a:solidFill>
                 <a:latin typeface="Calibri"/>
               </a:rPr>
-              <a:t>The rate with its count and its chance reference.</a:t>
+              <a:t>Student's orders, and how often chance makes the rise.</a:t>
             </a:r>
           </a:p>
         </p:txBody>
@@ -17717,7 +17717,7 @@
                 </a:solidFill>
                 <a:latin typeface="Calibri"/>
               </a:rPr>
-              <a:t>Did the discount work?</a:t>
+              <a:t>Did the sale lift spend?</a:t>
             </a:r>
           </a:p>
         </p:txBody>
@@ -17752,7 +17752,7 @@
                 </a:solidFill>
                 <a:latin typeface="Calibri"/>
               </a:rPr>
-              <a:t>Did the monsoon sale lift spend, and for whom?</a:t>
+              <a:t>The monsoon sale, and for whom.</a:t>
             </a:r>
           </a:p>
         </p:txBody>
@@ -17926,7 +17926,7 @@
                 </a:solidFill>
                 <a:latin typeface="Calibri"/>
               </a:rPr>
-              <a:t>What does Meera read?</a:t>
+              <a:t>What does the note say?</a:t>
             </a:r>
           </a:p>
         </p:txBody>
@@ -17961,7 +17961,7 @@
                 </a:solidFill>
                 <a:latin typeface="Calibri"/>
               </a:rPr>
-              <a:t>The hold-back sized on the platform's list, then the note under 200 words.</a:t>
+              <a:t>The Diwali hold-back sized, then the note under 200 words.</a:t>
             </a:r>
           </a:p>
         </p:txBody>
@@ -25920,7 +25920,7 @@
                 </a:solidFill>
                 <a:latin typeface="Georgia"/>
               </a:rPr>
-              <a:t>Answered in four moves, before Meera decides</a:t>
+              <a:t>Answered in four parts, before Meera decides</a:t>
             </a:r>
           </a:p>
         </p:txBody>
@@ -25955,7 +25955,7 @@
                 </a:solidFill>
                 <a:latin typeface="Calibri"/>
               </a:rPr>
-              <a:t>Who needs this answer, and which moves lead to it?</a:t>
+              <a:t>Who needs this answer, and which parts lead to it?</a:t>
             </a:r>
           </a:p>
         </p:txBody>
@@ -26249,7 +26249,7 @@
                 </a:solidFill>
                 <a:latin typeface="Calibri"/>
               </a:rPr>
-              <a:t>MOVE 1</a:t>
+              <a:t>PART 1</a:t>
             </a:r>
           </a:p>
         </p:txBody>
@@ -26319,7 +26319,7 @@
                 </a:solidFill>
                 <a:latin typeface="Calibri"/>
               </a:rPr>
-              <a:t>Compute Rs 4,850 and Rs 3,200 from the platform's list.</a:t>
+              <a:t>Make Rs 4,850 and Rs 3,200 appear from the platform's list.</a:t>
             </a:r>
           </a:p>
         </p:txBody>
@@ -26476,7 +26476,7 @@
                 </a:solidFill>
                 <a:latin typeface="Calibri"/>
               </a:rPr>
-              <a:t>MOVE 2</a:t>
+              <a:t>PART 2</a:t>
             </a:r>
           </a:p>
         </p:txBody>
@@ -26525,7 +26525,7 @@
         <p:spPr>
           <a:xfrm>
             <a:off x="3559987" y="4542536"/>
-            <a:ext cx="2243251" cy="399796"/>
+            <a:ext cx="2243251" cy="581406"/>
           </a:xfrm>
           <a:prstGeom prst="rect">
             <a:avLst/>
@@ -26546,7 +26546,7 @@
                 </a:solidFill>
                 <a:latin typeface="Calibri"/>
               </a:rPr>
-              <a:t>Say which customers sit in each group, and what else differs.</a:t>
+              <a:t>Who sits in each of Marketing's two groups, and what else differs.</a:t>
             </a:r>
           </a:p>
         </p:txBody>
@@ -26703,7 +26703,7 @@
                 </a:solidFill>
                 <a:latin typeface="Calibri"/>
               </a:rPr>
-              <a:t>MOVE 3</a:t>
+              <a:t>PART 3</a:t>
             </a:r>
           </a:p>
         </p:txBody>
@@ -26752,7 +26752,7 @@
         <p:spPr>
           <a:xfrm>
             <a:off x="6388455" y="4542536"/>
-            <a:ext cx="2243251" cy="581406"/>
+            <a:ext cx="2243251" cy="399796"/>
           </a:xfrm>
           <a:prstGeom prst="rect">
             <a:avLst/>
@@ -26773,7 +26773,7 @@
                 </a:solidFill>
                 <a:latin typeface="Calibri"/>
               </a:rPr>
-              <a:t>Like for like, inside Retail-Plus, with the counts beside each average.</a:t>
+              <a:t>Like for like, with the customers behind each average.</a:t>
             </a:r>
           </a:p>
         </p:txBody>
@@ -26936,7 +26936,7 @@
                 </a:solidFill>
                 <a:latin typeface="Calibri"/>
               </a:rPr>
-              <a:t>MOVE 4</a:t>
+              <a:t>PART 4</a:t>
             </a:r>
           </a:p>
         </p:txBody>
@@ -27006,7 +27006,7 @@
                 </a:solidFill>
                 <a:latin typeface="Calibri"/>
               </a:rPr>
-              <a:t>What the sale cost at list price, and the Diwali hold-back offered, in two sentences.</a:t>
+              <a:t>What the exposed paid at list price, and what a Diwali hold-back costs, in two sentences.</a:t>
             </a:r>
           </a:p>
         </p:txBody>

--- a/content/W01/D4/slides/C2_W01_D04_half2_STUDENT.pptx
+++ b/content/W01/D4/slides/C2_W01_D04_half2_STUDENT.pptx
@@ -1929,7 +1929,12 @@
           <a:lstStyle/>
           <a:p>
             <a:r>
-              <a:t>LIVE. Ten-minute break before this chapter, then forty minutes in pairs. Pairs work from</a:t>
+              <a:t>LIVE. Ten-minute break before this chapter, then forty minutes: four on S21 and S22, thirty-four</a:t>
+            </a:r>
+          </a:p>
+          <a:p>
+            <a:r>
+              <a:t>in pairs, and two on S23a once the replies are spoken. Pairs work from</a:t>
             </a:r>
           </a:p>
           <a:p>
@@ -1939,7 +1944,7 @@
           </a:p>
           <a:p>
             <a:r>
-              <a:t>One partner plays Marketing for the last eight minutes.</a:t>
+              <a:t>One partner plays Marketing for the last six minutes of the pairs' time.</a:t>
             </a:r>
           </a:p>
         </p:txBody>
@@ -2009,17 +2014,17 @@
           <a:lstStyle/>
           <a:p>
             <a:r>
-              <a:t>LIVE, 3 minutes. Part 4 is spoken before anything is written. The partner playing Marketing is</a:t>
-            </a:r>
-          </a:p>
-          <a:p>
-            <a:r>
-              <a:t>allowed to push once more, and the pair answers with chapter 6's design and its price. Then</a:t>
-            </a:r>
-          </a:p>
-          <a:p>
-            <a:r>
-              <a:t>Marketing's rebuttal.</a:t>
+              <a:t>LIVE, 2 minutes. Part 4 is spoken before anything is written. The partner playing Marketing is</a:t>
+            </a:r>
+          </a:p>
+          <a:p>
+            <a:r>
+              <a:t>allowed to push once more, and the pair answers with chapter 6's design, priced on this list for</a:t>
+            </a:r>
+          </a:p>
+          <a:p>
+            <a:r>
+              <a:t>both segments as part 4 asks, where chapter 6 priced Retail-Plus alone. Then Marketing's rebuttal.</a:t>
             </a:r>
           </a:p>
         </p:txBody>
@@ -2089,7 +2094,7 @@
           <a:lstStyle/>
           <a:p>
             <a:r>
-              <a:t>LIVE, 3 minutes. Both numbers are in the platform's list and the pair can reproduce them. The trap is</a:t>
+              <a:t>LIVE, 2 minutes. Both numbers are in the platform's list and the pair can reproduce them. The trap is</a:t>
             </a:r>
           </a:p>
           <a:p>
@@ -2169,7 +2174,7 @@
           <a:lstStyle/>
           <a:p>
             <a:r>
-              <a:t>LIVE, 3 minutes, then the pairs work for the rest of the forty. The campaigns table records 15</a:t>
+              <a:t>LIVE, 1 minute, when the pairs reach part 4, inside its eleven minutes. The campaigns table records 15</a:t>
             </a:r>
           </a:p>
           <a:p>
